--- a/12 simulacao de compra.pptx
+++ b/12 simulacao de compra.pptx
@@ -4,24 +4,26 @@
   <p:sldMasterIdLst>
     <p:sldMasterId id="2147483648" r:id="rId1"/>
   </p:sldMasterIdLst>
+  <p:notesMasterIdLst>
+    <p:notesMasterId r:id="rId16"/>
+  </p:notesMasterIdLst>
   <p:sldIdLst>
-    <p:sldId id="256" r:id="rId7"/>
-    <p:sldId id="257" r:id="rId9"/>
-    <p:sldId id="258" r:id="rId10"/>
-    <p:sldId id="259" r:id="rId11"/>
-    <p:sldId id="260" r:id="rId12"/>
-    <p:sldId id="261" r:id="rId13"/>
-    <p:sldId id="262" r:id="rId14"/>
-    <p:sldId id="263" r:id="rId15"/>
-    <p:sldId id="264" r:id="rId16"/>
-    <p:sldId id="265" r:id="rId17"/>
-    <p:sldId id="266" r:id="rId18"/>
-    <p:sldId id="267" r:id="rId19"/>
-    <p:sldId id="268" r:id="rId20"/>
-    <p:sldId id="269" r:id="rId21"/>
-    <p:sldId id="270" r:id="rId22"/>
+    <p:sldId id="322" r:id="rId2"/>
+    <p:sldId id="323" r:id="rId3"/>
+    <p:sldId id="324" r:id="rId4"/>
+    <p:sldId id="325" r:id="rId5"/>
+    <p:sldId id="326" r:id="rId6"/>
+    <p:sldId id="327" r:id="rId7"/>
+    <p:sldId id="328" r:id="rId8"/>
+    <p:sldId id="329" r:id="rId9"/>
+    <p:sldId id="330" r:id="rId10"/>
+    <p:sldId id="332" r:id="rId11"/>
+    <p:sldId id="333" r:id="rId12"/>
+    <p:sldId id="331" r:id="rId13"/>
+    <p:sldId id="335" r:id="rId14"/>
+    <p:sldId id="336" r:id="rId15"/>
   </p:sldIdLst>
-  <p:sldSz cx="12191695" cy="6858000" type="screen4x3"/>
+  <p:sldSz cx="12192000" cy="6858000"/>
   <p:notesSz cx="6858000" cy="9144000"/>
   <p:defaultTextStyle>
     <a:defPPr>
@@ -118,11 +120,27 @@
       </a:defRPr>
     </a:lvl9pPr>
   </p:defaultTextStyle>
+  <p:extLst>
+    <p:ext uri="{EFAFB233-063F-42B5-8137-9DF3F51BA10A}">
+      <p15:sldGuideLst xmlns:p15="http://schemas.microsoft.com/office/powerpoint/2012/main">
+        <p15:guide id="1" orient="horz" pos="2160">
+          <p15:clr>
+            <a:srgbClr val="A4A3A4"/>
+          </p15:clr>
+        </p15:guide>
+        <p15:guide id="2" pos="2880">
+          <p15:clr>
+            <a:srgbClr val="A4A3A4"/>
+          </p15:clr>
+        </p15:guide>
+      </p15:sldGuideLst>
+    </p:ext>
+  </p:extLst>
 </p:presentation>
 </file>
 
 <file path=ppt/notesMasters/notesMaster1.xml><?xml version="1.0" encoding="utf-8"?>
-<p:notesMaster xmlns:a="http://schemas.openxmlformats.org/drawingml/2006/main" xmlns:p="http://schemas.openxmlformats.org/presentationml/2006/main" xmlns:r="http://schemas.openxmlformats.org/officeDocument/2006/relationships">
+<p:notesMaster xmlns:a="http://schemas.openxmlformats.org/drawingml/2006/main" xmlns:r="http://schemas.openxmlformats.org/officeDocument/2006/relationships" xmlns:p="http://schemas.openxmlformats.org/presentationml/2006/main">
   <p:cSld>
     <p:bg>
       <p:bgRef idx="1001">
@@ -143,241 +161,16 @@
           <a:chExt cx="0" cy="0"/>
         </a:xfrm>
       </p:grpSpPr>
-      <p:sp>
-        <p:nvSpPr>
-          <p:cNvPr id="2" name="Header Placeholder 1"/>
-          <p:cNvSpPr>
-            <a:spLocks noGrp="1"/>
-          </p:cNvSpPr>
-          <p:nvPr>
-            <p:ph type="hdr" sz="quarter"/>
-          </p:nvPr>
-        </p:nvSpPr>
-        <p:spPr>
-          <a:xfrm>
-            <a:off x="0" y="0"/>
-            <a:ext cx="2971800" cy="457200"/>
-          </a:xfrm>
-          <a:prstGeom prst="rect">
-            <a:avLst/>
-          </a:prstGeom>
-        </p:spPr>
-        <p:txBody>
-          <a:bodyPr vert="horz" lIns="91440" tIns="45720" rIns="91440" bIns="45720" rtlCol="0"/>
-          <a:lstStyle>
-            <a:lvl1pPr algn="l">
-              <a:defRPr sz="1200"/>
-            </a:lvl1pPr>
-          </a:lstStyle>
-          <a:p>
-            <a:endParaRPr lang="en-US"/>
-          </a:p>
-        </p:txBody>
-      </p:sp>
-      <p:sp>
-        <p:nvSpPr>
-          <p:cNvPr id="3" name="Date Placeholder 2"/>
-          <p:cNvSpPr>
-            <a:spLocks noGrp="1"/>
-          </p:cNvSpPr>
-          <p:nvPr>
-            <p:ph type="dt" idx="1"/>
-          </p:nvPr>
-        </p:nvSpPr>
-        <p:spPr>
-          <a:xfrm>
-            <a:off x="3884613" y="0"/>
-            <a:ext cx="2971800" cy="457200"/>
-          </a:xfrm>
-          <a:prstGeom prst="rect">
-            <a:avLst/>
-          </a:prstGeom>
-        </p:spPr>
-        <p:txBody>
-          <a:bodyPr vert="horz" lIns="91440" tIns="45720" rIns="91440" bIns="45720" rtlCol="0"/>
-          <a:lstStyle>
-            <a:lvl1pPr algn="r">
-              <a:defRPr sz="1200"/>
-            </a:lvl1pPr>
-          </a:lstStyle>
-          <a:p>
-            <a:fld id="{0F89C1C7-3DCD-1040-A9CF-14679D8B5DDD}" type="datetimeFigureOut">
-              <a:rPr lang="en-US" smtClean="0"/>
-              <a:t>10/17/16</a:t>
-            </a:fld>
-            <a:endParaRPr lang="en-US"/>
-          </a:p>
-        </p:txBody>
-      </p:sp>
-      <p:sp>
-        <p:nvSpPr>
-          <p:cNvPr id="4" name="Slide Image Placeholder 3"/>
-          <p:cNvSpPr>
-            <a:spLocks noGrp="1" noRot="1" noChangeAspect="1"/>
-          </p:cNvSpPr>
-          <p:nvPr>
-            <p:ph type="sldImg" idx="2"/>
-          </p:nvPr>
-        </p:nvSpPr>
-        <p:spPr>
-          <a:xfrm>
-            <a:off x="1143000" y="685800"/>
-            <a:ext cx="4572000" cy="3429000"/>
-          </a:xfrm>
-          <a:prstGeom prst="rect">
-            <a:avLst/>
-          </a:prstGeom>
-          <a:noFill/>
-          <a:ln w="12700">
-            <a:solidFill>
-              <a:prstClr val="black"/>
-            </a:solidFill>
-          </a:ln>
-        </p:spPr>
-        <p:txBody>
-          <a:bodyPr vert="horz" lIns="91440" tIns="45720" rIns="91440" bIns="45720" rtlCol="0" anchor="ctr"/>
-          <a:lstStyle/>
-          <a:p>
-            <a:endParaRPr lang="en-US"/>
-          </a:p>
-        </p:txBody>
-      </p:sp>
-      <p:sp>
-        <p:nvSpPr>
-          <p:cNvPr id="5" name="Notes Placeholder 4"/>
-          <p:cNvSpPr>
-            <a:spLocks noGrp="1"/>
-          </p:cNvSpPr>
-          <p:nvPr>
-            <p:ph type="body" sz="quarter" idx="3"/>
-          </p:nvPr>
-        </p:nvSpPr>
-        <p:spPr>
-          <a:xfrm>
-            <a:off x="685800" y="4343400"/>
-            <a:ext cx="5486400" cy="4114800"/>
-          </a:xfrm>
-          <a:prstGeom prst="rect">
-            <a:avLst/>
-          </a:prstGeom>
-        </p:spPr>
-        <p:txBody>
-          <a:bodyPr vert="horz" lIns="91440" tIns="45720" rIns="91440" bIns="45720" rtlCol="0"/>
-          <a:lstStyle/>
-          <a:p>
-            <a:pPr lvl="0"/>
-            <a:r>
-              <a:rPr lang="en-US" smtClean="0"/>
-              <a:t>Click to edit Master text styles</a:t>
-            </a:r>
-          </a:p>
-          <a:p>
-            <a:pPr lvl="1"/>
-            <a:r>
-              <a:rPr lang="en-US" smtClean="0"/>
-              <a:t>Second level</a:t>
-            </a:r>
-          </a:p>
-          <a:p>
-            <a:pPr lvl="2"/>
-            <a:r>
-              <a:rPr lang="en-US" smtClean="0"/>
-              <a:t>Third level</a:t>
-            </a:r>
-          </a:p>
-          <a:p>
-            <a:pPr lvl="3"/>
-            <a:r>
-              <a:rPr lang="en-US" smtClean="0"/>
-              <a:t>Fourth level</a:t>
-            </a:r>
-          </a:p>
-          <a:p>
-            <a:pPr lvl="4"/>
-            <a:r>
-              <a:rPr lang="en-US" smtClean="0"/>
-              <a:t>Fifth level</a:t>
-            </a:r>
-            <a:endParaRPr lang="en-US"/>
-          </a:p>
-        </p:txBody>
-      </p:sp>
-      <p:sp>
-        <p:nvSpPr>
-          <p:cNvPr id="6" name="Footer Placeholder 5"/>
-          <p:cNvSpPr>
-            <a:spLocks noGrp="1"/>
-          </p:cNvSpPr>
-          <p:nvPr>
-            <p:ph type="ftr" sz="quarter" idx="4"/>
-          </p:nvPr>
-        </p:nvSpPr>
-        <p:spPr>
-          <a:xfrm>
-            <a:off x="0" y="8685213"/>
-            <a:ext cx="2971800" cy="457200"/>
-          </a:xfrm>
-          <a:prstGeom prst="rect">
-            <a:avLst/>
-          </a:prstGeom>
-        </p:spPr>
-        <p:txBody>
-          <a:bodyPr vert="horz" lIns="91440" tIns="45720" rIns="91440" bIns="45720" rtlCol="0" anchor="b"/>
-          <a:lstStyle>
-            <a:lvl1pPr algn="l">
-              <a:defRPr sz="1200"/>
-            </a:lvl1pPr>
-          </a:lstStyle>
-          <a:p>
-            <a:endParaRPr lang="en-US"/>
-          </a:p>
-        </p:txBody>
-      </p:sp>
-      <p:sp>
-        <p:nvSpPr>
-          <p:cNvPr id="7" name="Slide Number Placeholder 6"/>
-          <p:cNvSpPr>
-            <a:spLocks noGrp="1"/>
-          </p:cNvSpPr>
-          <p:nvPr>
-            <p:ph type="sldNum" sz="quarter" idx="5"/>
-          </p:nvPr>
-        </p:nvSpPr>
-        <p:spPr>
-          <a:xfrm>
-            <a:off x="3884613" y="8685213"/>
-            <a:ext cx="2971800" cy="457200"/>
-          </a:xfrm>
-          <a:prstGeom prst="rect">
-            <a:avLst/>
-          </a:prstGeom>
-        </p:spPr>
-        <p:txBody>
-          <a:bodyPr vert="horz" lIns="91440" tIns="45720" rIns="91440" bIns="45720" rtlCol="0" anchor="b"/>
-          <a:lstStyle>
-            <a:lvl1pPr algn="r">
-              <a:defRPr sz="1200"/>
-            </a:lvl1pPr>
-          </a:lstStyle>
-          <a:p>
-            <a:fld id="{BB5E49A5-4136-284D-997B-48E1D791AD67}" type="slidenum">
-              <a:rPr lang="en-US" smtClean="0"/>
-              <a:t>‹#›</a:t>
-            </a:fld>
-            <a:endParaRPr lang="en-US"/>
-          </a:p>
-        </p:txBody>
-      </p:sp>
     </p:spTree>
     <p:extLst>
       <p:ext uri="{BB962C8B-B14F-4D97-AF65-F5344CB8AC3E}">
-        <p14:creationId xmlns:p14="http://schemas.microsoft.com/office/powerpoint/2010/main" val="2623252185"/>
+        <p14:creationId xmlns:p14="http://schemas.microsoft.com/office/powerpoint/2010/main" val="1286994050"/>
       </p:ext>
     </p:extLst>
   </p:cSld>
   <p:clrMap bg1="lt1" tx1="dk1" bg2="lt2" tx2="dk2" accent1="accent1" accent2="accent2" accent3="accent3" accent4="accent4" accent5="accent5" accent6="accent6" hlink="hlink" folHlink="folHlink"/>
   <p:notesStyle>
-    <a:lvl1pPr marL="0" algn="l" defTabSz="457200" rtl="0" eaLnBrk="1" latinLnBrk="0" hangingPunct="1">
+    <a:lvl1pPr marL="0" algn="l" defTabSz="914400" rtl="0" eaLnBrk="1" latinLnBrk="0" hangingPunct="1">
       <a:defRPr sz="1200" kern="1200">
         <a:solidFill>
           <a:schemeClr val="tx1"/>
@@ -387,7 +180,7 @@
         <a:cs typeface="+mn-cs"/>
       </a:defRPr>
     </a:lvl1pPr>
-    <a:lvl2pPr marL="457200" algn="l" defTabSz="457200" rtl="0" eaLnBrk="1" latinLnBrk="0" hangingPunct="1">
+    <a:lvl2pPr marL="457200" algn="l" defTabSz="914400" rtl="0" eaLnBrk="1" latinLnBrk="0" hangingPunct="1">
       <a:defRPr sz="1200" kern="1200">
         <a:solidFill>
           <a:schemeClr val="tx1"/>
@@ -397,7 +190,7 @@
         <a:cs typeface="+mn-cs"/>
       </a:defRPr>
     </a:lvl2pPr>
-    <a:lvl3pPr marL="914400" algn="l" defTabSz="457200" rtl="0" eaLnBrk="1" latinLnBrk="0" hangingPunct="1">
+    <a:lvl3pPr marL="914400" algn="l" defTabSz="914400" rtl="0" eaLnBrk="1" latinLnBrk="0" hangingPunct="1">
       <a:defRPr sz="1200" kern="1200">
         <a:solidFill>
           <a:schemeClr val="tx1"/>
@@ -407,7 +200,7 @@
         <a:cs typeface="+mn-cs"/>
       </a:defRPr>
     </a:lvl3pPr>
-    <a:lvl4pPr marL="1371600" algn="l" defTabSz="457200" rtl="0" eaLnBrk="1" latinLnBrk="0" hangingPunct="1">
+    <a:lvl4pPr marL="1371600" algn="l" defTabSz="914400" rtl="0" eaLnBrk="1" latinLnBrk="0" hangingPunct="1">
       <a:defRPr sz="1200" kern="1200">
         <a:solidFill>
           <a:schemeClr val="tx1"/>
@@ -417,7 +210,7 @@
         <a:cs typeface="+mn-cs"/>
       </a:defRPr>
     </a:lvl4pPr>
-    <a:lvl5pPr marL="1828800" algn="l" defTabSz="457200" rtl="0" eaLnBrk="1" latinLnBrk="0" hangingPunct="1">
+    <a:lvl5pPr marL="1828800" algn="l" defTabSz="914400" rtl="0" eaLnBrk="1" latinLnBrk="0" hangingPunct="1">
       <a:defRPr sz="1200" kern="1200">
         <a:solidFill>
           <a:schemeClr val="tx1"/>
@@ -427,7 +220,7 @@
         <a:cs typeface="+mn-cs"/>
       </a:defRPr>
     </a:lvl5pPr>
-    <a:lvl6pPr marL="2286000" algn="l" defTabSz="457200" rtl="0" eaLnBrk="1" latinLnBrk="0" hangingPunct="1">
+    <a:lvl6pPr marL="2286000" algn="l" defTabSz="914400" rtl="0" eaLnBrk="1" latinLnBrk="0" hangingPunct="1">
       <a:defRPr sz="1200" kern="1200">
         <a:solidFill>
           <a:schemeClr val="tx1"/>
@@ -437,7 +230,7 @@
         <a:cs typeface="+mn-cs"/>
       </a:defRPr>
     </a:lvl6pPr>
-    <a:lvl7pPr marL="2743200" algn="l" defTabSz="457200" rtl="0" eaLnBrk="1" latinLnBrk="0" hangingPunct="1">
+    <a:lvl7pPr marL="2743200" algn="l" defTabSz="914400" rtl="0" eaLnBrk="1" latinLnBrk="0" hangingPunct="1">
       <a:defRPr sz="1200" kern="1200">
         <a:solidFill>
           <a:schemeClr val="tx1"/>
@@ -447,7 +240,7 @@
         <a:cs typeface="+mn-cs"/>
       </a:defRPr>
     </a:lvl7pPr>
-    <a:lvl8pPr marL="3200400" algn="l" defTabSz="457200" rtl="0" eaLnBrk="1" latinLnBrk="0" hangingPunct="1">
+    <a:lvl8pPr marL="3200400" algn="l" defTabSz="914400" rtl="0" eaLnBrk="1" latinLnBrk="0" hangingPunct="1">
       <a:defRPr sz="1200" kern="1200">
         <a:solidFill>
           <a:schemeClr val="tx1"/>
@@ -457,7 +250,7 @@
         <a:cs typeface="+mn-cs"/>
       </a:defRPr>
     </a:lvl8pPr>
-    <a:lvl9pPr marL="3657600" algn="l" defTabSz="457200" rtl="0" eaLnBrk="1" latinLnBrk="0" hangingPunct="1">
+    <a:lvl9pPr marL="3657600" algn="l" defTabSz="914400" rtl="0" eaLnBrk="1" latinLnBrk="0" hangingPunct="1">
       <a:defRPr sz="1200" kern="1200">
         <a:solidFill>
           <a:schemeClr val="tx1"/>
@@ -472,7 +265,7 @@
 </file>
 
 <file path=ppt/notesSlides/notesSlide1.xml><?xml version="1.0" encoding="utf-8"?>
-<p:notes xmlns:a="http://schemas.openxmlformats.org/drawingml/2006/main" xmlns:p="http://schemas.openxmlformats.org/presentationml/2006/main" xmlns:r="http://schemas.openxmlformats.org/officeDocument/2006/relationships">
+<p:notes xmlns:a="http://schemas.openxmlformats.org/drawingml/2006/main" xmlns:r="http://schemas.openxmlformats.org/officeDocument/2006/relationships" xmlns:p="http://schemas.openxmlformats.org/presentationml/2006/main">
   <p:cSld>
     <p:spTree>
       <p:nvGrpSpPr>
@@ -492,7 +285,7 @@
         <p:nvSpPr>
           <p:cNvPr id="2" name="Slide Image Placeholder 1"/>
           <p:cNvSpPr>
-            <a:spLocks noGrp="1"/>
+            <a:spLocks noGrp="1" noRot="1" noChangeAspect="1"/>
           </p:cNvSpPr>
           <p:nvPr>
             <p:ph type="sldImg" idx="2"/>
@@ -507,7 +300,7 @@
             <a:spLocks noGrp="1"/>
           </p:cNvSpPr>
           <p:nvPr>
-            <p:ph type="body" idx="3" sz="quarter"/>
+            <p:ph type="body" sz="quarter" idx="3"/>
           </p:nvPr>
         </p:nvSpPr>
         <p:spPr/>
@@ -516,12 +309,7 @@
           <a:lstStyle/>
           <a:p>
             <a:r>
-              <a:t>[AULA E-COMMERCE - MODULO 12 - SLIDE 1]</a:t>
-            </a:r>
-          </a:p>
-          <a:p>
-            <a:r>
-              <a:t>Abertura do Modulo 12: Simulacao Completa de Compra e Gestao de Pedidos. Apresentar os objetivos finais: percorrer o fluxo completo do ponto de vista do comprador e ensinar o lojista a gerenciar pedidos no painel.</a:t>
+              <a:t>Passo a passo no painel: mostrar onde fica o menu lateral de Plugins e o botao 'Adicionar Novo' que conecta ao repositorio oficial.</a:t>
             </a:r>
           </a:p>
         </p:txBody>
@@ -533,12 +321,17 @@
             <a:spLocks noGrp="1"/>
           </p:cNvSpPr>
           <p:nvPr>
-            <p:ph type="sldNum" idx="5" sz="quarter"/>
+            <p:ph type="sldNum" sz="quarter" idx="5"/>
           </p:nvPr>
         </p:nvSpPr>
         <p:spPr/>
       </p:sp>
     </p:spTree>
+    <p:extLst>
+      <p:ext uri="{BB962C8B-B14F-4D97-AF65-F5344CB8AC3E}">
+        <p14:creationId xmlns:p14="http://schemas.microsoft.com/office/powerpoint/2010/main" val="465457270"/>
+      </p:ext>
+    </p:extLst>
   </p:cSld>
   <p:clrMapOvr>
     <a:masterClrMapping/>
@@ -547,7 +340,7 @@
 </file>
 
 <file path=ppt/notesSlides/notesSlide10.xml><?xml version="1.0" encoding="utf-8"?>
-<p:notes xmlns:a="http://schemas.openxmlformats.org/drawingml/2006/main" xmlns:p="http://schemas.openxmlformats.org/presentationml/2006/main" xmlns:r="http://schemas.openxmlformats.org/officeDocument/2006/relationships">
+<p:notes xmlns:a="http://schemas.openxmlformats.org/drawingml/2006/main" xmlns:r="http://schemas.openxmlformats.org/officeDocument/2006/relationships" xmlns:p="http://schemas.openxmlformats.org/presentationml/2006/main">
   <p:cSld>
     <p:spTree>
       <p:nvGrpSpPr>
@@ -567,7 +360,7 @@
         <p:nvSpPr>
           <p:cNvPr id="2" name="Slide Image Placeholder 1"/>
           <p:cNvSpPr>
-            <a:spLocks noGrp="1"/>
+            <a:spLocks noGrp="1" noRot="1" noChangeAspect="1"/>
           </p:cNvSpPr>
           <p:nvPr>
             <p:ph type="sldImg" idx="2"/>
@@ -582,7 +375,7 @@
             <a:spLocks noGrp="1"/>
           </p:cNvSpPr>
           <p:nvPr>
-            <p:ph type="body" idx="3" sz="quarter"/>
+            <p:ph type="body" sz="quarter" idx="3"/>
           </p:nvPr>
         </p:nvSpPr>
         <p:spPr/>
@@ -591,12 +384,7 @@
           <a:lstStyle/>
           <a:p>
             <a:r>
-              <a:t>[AULA E-COMMERCE - MODULO 12 - SLIDE 10]</a:t>
-            </a:r>
-          </a:p>
-          <a:p>
-            <a:r>
-              <a:t>Etapa 8: Tela de Confirmacao: Apresentar a pagina de pedido recebido (Thank You Page), numero do pedido e canal de suporte.</a:t>
+              <a:t>Passo a passo no painel: mostrar onde fica o menu lateral de Plugins e o botao 'Adicionar Novo' que conecta ao repositorio oficial.</a:t>
             </a:r>
           </a:p>
         </p:txBody>
@@ -608,12 +396,17 @@
             <a:spLocks noGrp="1"/>
           </p:cNvSpPr>
           <p:nvPr>
-            <p:ph type="sldNum" idx="5" sz="quarter"/>
+            <p:ph type="sldNum" sz="quarter" idx="5"/>
           </p:nvPr>
         </p:nvSpPr>
         <p:spPr/>
       </p:sp>
     </p:spTree>
+    <p:extLst>
+      <p:ext uri="{BB962C8B-B14F-4D97-AF65-F5344CB8AC3E}">
+        <p14:creationId xmlns:p14="http://schemas.microsoft.com/office/powerpoint/2010/main" val="322884294"/>
+      </p:ext>
+    </p:extLst>
   </p:cSld>
   <p:clrMapOvr>
     <a:masterClrMapping/>
@@ -622,7 +415,7 @@
 </file>
 
 <file path=ppt/notesSlides/notesSlide11.xml><?xml version="1.0" encoding="utf-8"?>
-<p:notes xmlns:a="http://schemas.openxmlformats.org/drawingml/2006/main" xmlns:p="http://schemas.openxmlformats.org/presentationml/2006/main" xmlns:r="http://schemas.openxmlformats.org/officeDocument/2006/relationships">
+<p:notes xmlns:a="http://schemas.openxmlformats.org/drawingml/2006/main" xmlns:r="http://schemas.openxmlformats.org/officeDocument/2006/relationships" xmlns:p="http://schemas.openxmlformats.org/presentationml/2006/main">
   <p:cSld>
     <p:spTree>
       <p:nvGrpSpPr>
@@ -642,7 +435,7 @@
         <p:nvSpPr>
           <p:cNvPr id="2" name="Slide Image Placeholder 1"/>
           <p:cNvSpPr>
-            <a:spLocks noGrp="1"/>
+            <a:spLocks noGrp="1" noRot="1" noChangeAspect="1"/>
           </p:cNvSpPr>
           <p:nvPr>
             <p:ph type="sldImg" idx="2"/>
@@ -657,7 +450,7 @@
             <a:spLocks noGrp="1"/>
           </p:cNvSpPr>
           <p:nvPr>
-            <p:ph type="body" idx="3" sz="quarter"/>
+            <p:ph type="body" sz="quarter" idx="3"/>
           </p:nvPr>
         </p:nvSpPr>
         <p:spPr/>
@@ -666,12 +459,7 @@
           <a:lstStyle/>
           <a:p>
             <a:r>
-              <a:t>[AULA E-COMMERCE - MODULO 12 - SLIDE 11]</a:t>
-            </a:r>
-          </a:p>
-          <a:p>
-            <a:r>
-              <a:t>Etapa 9: Emails Automaticos: Detalhar os 6 tipos de emails transacionais disparados pelo WooCommerce para o cliente e lojista.</a:t>
+              <a:t>Passo a passo no painel: mostrar onde fica o menu lateral de Plugins e o botao 'Adicionar Novo' que conecta ao repositorio oficial.</a:t>
             </a:r>
           </a:p>
         </p:txBody>
@@ -683,12 +471,17 @@
             <a:spLocks noGrp="1"/>
           </p:cNvSpPr>
           <p:nvPr>
-            <p:ph type="sldNum" idx="5" sz="quarter"/>
+            <p:ph type="sldNum" sz="quarter" idx="5"/>
           </p:nvPr>
         </p:nvSpPr>
         <p:spPr/>
       </p:sp>
     </p:spTree>
+    <p:extLst>
+      <p:ext uri="{BB962C8B-B14F-4D97-AF65-F5344CB8AC3E}">
+        <p14:creationId xmlns:p14="http://schemas.microsoft.com/office/powerpoint/2010/main" val="2389010469"/>
+      </p:ext>
+    </p:extLst>
   </p:cSld>
   <p:clrMapOvr>
     <a:masterClrMapping/>
@@ -697,7 +490,7 @@
 </file>
 
 <file path=ppt/notesSlides/notesSlide12.xml><?xml version="1.0" encoding="utf-8"?>
-<p:notes xmlns:a="http://schemas.openxmlformats.org/drawingml/2006/main" xmlns:p="http://schemas.openxmlformats.org/presentationml/2006/main" xmlns:r="http://schemas.openxmlformats.org/officeDocument/2006/relationships">
+<p:notes xmlns:a="http://schemas.openxmlformats.org/drawingml/2006/main" xmlns:r="http://schemas.openxmlformats.org/officeDocument/2006/relationships" xmlns:p="http://schemas.openxmlformats.org/presentationml/2006/main">
   <p:cSld>
     <p:spTree>
       <p:nvGrpSpPr>
@@ -717,7 +510,7 @@
         <p:nvSpPr>
           <p:cNvPr id="2" name="Slide Image Placeholder 1"/>
           <p:cNvSpPr>
-            <a:spLocks noGrp="1"/>
+            <a:spLocks noGrp="1" noRot="1" noChangeAspect="1"/>
           </p:cNvSpPr>
           <p:nvPr>
             <p:ph type="sldImg" idx="2"/>
@@ -732,7 +525,7 @@
             <a:spLocks noGrp="1"/>
           </p:cNvSpPr>
           <p:nvPr>
-            <p:ph type="body" idx="3" sz="quarter"/>
+            <p:ph type="body" sz="quarter" idx="3"/>
           </p:nvPr>
         </p:nvSpPr>
         <p:spPr/>
@@ -741,12 +534,7 @@
           <a:lstStyle/>
           <a:p>
             <a:r>
-              <a:t>[AULA E-COMMERCE - MODULO 12 - SLIDE 12]</a:t>
-            </a:r>
-          </a:p>
-          <a:p>
-            <a:r>
-              <a:t>Visao do Lojista: O Painel de Pedidos: Navegar em WooCommerce &gt; Pedidos e explicar os status (Pendente, Processando, Concluido, Cancelado).</a:t>
+              <a:t>Passo a passo no painel: mostrar onde fica o menu lateral de Plugins e o botao 'Adicionar Novo' que conecta ao repositorio oficial.</a:t>
             </a:r>
           </a:p>
         </p:txBody>
@@ -758,12 +546,17 @@
             <a:spLocks noGrp="1"/>
           </p:cNvSpPr>
           <p:nvPr>
-            <p:ph type="sldNum" idx="5" sz="quarter"/>
+            <p:ph type="sldNum" sz="quarter" idx="5"/>
           </p:nvPr>
         </p:nvSpPr>
         <p:spPr/>
       </p:sp>
     </p:spTree>
+    <p:extLst>
+      <p:ext uri="{BB962C8B-B14F-4D97-AF65-F5344CB8AC3E}">
+        <p14:creationId xmlns:p14="http://schemas.microsoft.com/office/powerpoint/2010/main" val="3358131609"/>
+      </p:ext>
+    </p:extLst>
   </p:cSld>
   <p:clrMapOvr>
     <a:masterClrMapping/>
@@ -772,7 +565,7 @@
 </file>
 
 <file path=ppt/notesSlides/notesSlide13.xml><?xml version="1.0" encoding="utf-8"?>
-<p:notes xmlns:a="http://schemas.openxmlformats.org/drawingml/2006/main" xmlns:p="http://schemas.openxmlformats.org/presentationml/2006/main" xmlns:r="http://schemas.openxmlformats.org/officeDocument/2006/relationships">
+<p:notes xmlns:a="http://schemas.openxmlformats.org/drawingml/2006/main" xmlns:r="http://schemas.openxmlformats.org/officeDocument/2006/relationships" xmlns:p="http://schemas.openxmlformats.org/presentationml/2006/main">
   <p:cSld>
     <p:spTree>
       <p:nvGrpSpPr>
@@ -792,7 +585,7 @@
         <p:nvSpPr>
           <p:cNvPr id="2" name="Slide Image Placeholder 1"/>
           <p:cNvSpPr>
-            <a:spLocks noGrp="1"/>
+            <a:spLocks noGrp="1" noRot="1" noChangeAspect="1"/>
           </p:cNvSpPr>
           <p:nvPr>
             <p:ph type="sldImg" idx="2"/>
@@ -807,7 +600,7 @@
             <a:spLocks noGrp="1"/>
           </p:cNvSpPr>
           <p:nvPr>
-            <p:ph type="body" idx="3" sz="quarter"/>
+            <p:ph type="body" sz="quarter" idx="3"/>
           </p:nvPr>
         </p:nvSpPr>
         <p:spPr/>
@@ -816,12 +609,7 @@
           <a:lstStyle/>
           <a:p>
             <a:r>
-              <a:t>[AULA E-COMMERCE - MODULO 12 - SLIDE 13]</a:t>
-            </a:r>
-          </a:p>
-          <a:p>
-            <a:r>
-              <a:t>Expedicao e Rastreio: Roteiro pratico de separacao, impressao de etiquetas no Melhor Envio, despacho nos Correios e envio do rastreio ao cliente.</a:t>
+              <a:t>Passo a passo no painel: mostrar onde fica o menu lateral de Plugins e o botao 'Adicionar Novo' que conecta ao repositorio oficial.</a:t>
             </a:r>
           </a:p>
         </p:txBody>
@@ -833,12 +621,17 @@
             <a:spLocks noGrp="1"/>
           </p:cNvSpPr>
           <p:nvPr>
-            <p:ph type="sldNum" idx="5" sz="quarter"/>
+            <p:ph type="sldNum" sz="quarter" idx="5"/>
           </p:nvPr>
         </p:nvSpPr>
         <p:spPr/>
       </p:sp>
     </p:spTree>
+    <p:extLst>
+      <p:ext uri="{BB962C8B-B14F-4D97-AF65-F5344CB8AC3E}">
+        <p14:creationId xmlns:p14="http://schemas.microsoft.com/office/powerpoint/2010/main" val="2780805530"/>
+      </p:ext>
+    </p:extLst>
   </p:cSld>
   <p:clrMapOvr>
     <a:masterClrMapping/>
@@ -847,7 +640,7 @@
 </file>
 
 <file path=ppt/notesSlides/notesSlide14.xml><?xml version="1.0" encoding="utf-8"?>
-<p:notes xmlns:a="http://schemas.openxmlformats.org/drawingml/2006/main" xmlns:p="http://schemas.openxmlformats.org/presentationml/2006/main" xmlns:r="http://schemas.openxmlformats.org/officeDocument/2006/relationships">
+<p:notes xmlns:a="http://schemas.openxmlformats.org/drawingml/2006/main" xmlns:r="http://schemas.openxmlformats.org/officeDocument/2006/relationships" xmlns:p="http://schemas.openxmlformats.org/presentationml/2006/main">
   <p:cSld>
     <p:spTree>
       <p:nvGrpSpPr>
@@ -867,7 +660,7 @@
         <p:nvSpPr>
           <p:cNvPr id="2" name="Slide Image Placeholder 1"/>
           <p:cNvSpPr>
-            <a:spLocks noGrp="1"/>
+            <a:spLocks noGrp="1" noRot="1" noChangeAspect="1"/>
           </p:cNvSpPr>
           <p:nvPr>
             <p:ph type="sldImg" idx="2"/>
@@ -882,7 +675,7 @@
             <a:spLocks noGrp="1"/>
           </p:cNvSpPr>
           <p:nvPr>
-            <p:ph type="body" idx="3" sz="quarter"/>
+            <p:ph type="body" sz="quarter" idx="3"/>
           </p:nvPr>
         </p:nvSpPr>
         <p:spPr/>
@@ -891,12 +684,7 @@
           <a:lstStyle/>
           <a:p>
             <a:r>
-              <a:t>[AULA E-COMMERCE - MODULO 12 - SLIDE 14]</a:t>
-            </a:r>
-          </a:p>
-          <a:p>
-            <a:r>
-              <a:t>Recuperacao de Vendas: Tecnicas de resgate de Pix pendente e carrinhos abandonados via WhatsApp e sequencia de emails.</a:t>
+              <a:t>Passo a passo no painel: mostrar onde fica o menu lateral de Plugins e o botao 'Adicionar Novo' que conecta ao repositorio oficial.</a:t>
             </a:r>
           </a:p>
         </p:txBody>
@@ -908,12 +696,17 @@
             <a:spLocks noGrp="1"/>
           </p:cNvSpPr>
           <p:nvPr>
-            <p:ph type="sldNum" idx="5" sz="quarter"/>
+            <p:ph type="sldNum" sz="quarter" idx="5"/>
           </p:nvPr>
         </p:nvSpPr>
         <p:spPr/>
       </p:sp>
     </p:spTree>
+    <p:extLst>
+      <p:ext uri="{BB962C8B-B14F-4D97-AF65-F5344CB8AC3E}">
+        <p14:creationId xmlns:p14="http://schemas.microsoft.com/office/powerpoint/2010/main" val="1388917297"/>
+      </p:ext>
+    </p:extLst>
   </p:cSld>
   <p:clrMapOvr>
     <a:masterClrMapping/>
@@ -921,8 +714,8 @@
 </p:notes>
 </file>
 
-<file path=ppt/notesSlides/notesSlide15.xml><?xml version="1.0" encoding="utf-8"?>
-<p:notes xmlns:a="http://schemas.openxmlformats.org/drawingml/2006/main" xmlns:p="http://schemas.openxmlformats.org/presentationml/2006/main" xmlns:r="http://schemas.openxmlformats.org/officeDocument/2006/relationships">
+<file path=ppt/notesSlides/notesSlide2.xml><?xml version="1.0" encoding="utf-8"?>
+<p:notes xmlns:a="http://schemas.openxmlformats.org/drawingml/2006/main" xmlns:r="http://schemas.openxmlformats.org/officeDocument/2006/relationships" xmlns:p="http://schemas.openxmlformats.org/presentationml/2006/main">
   <p:cSld>
     <p:spTree>
       <p:nvGrpSpPr>
@@ -942,7 +735,7 @@
         <p:nvSpPr>
           <p:cNvPr id="2" name="Slide Image Placeholder 1"/>
           <p:cNvSpPr>
-            <a:spLocks noGrp="1"/>
+            <a:spLocks noGrp="1" noRot="1" noChangeAspect="1"/>
           </p:cNvSpPr>
           <p:nvPr>
             <p:ph type="sldImg" idx="2"/>
@@ -957,7 +750,7 @@
             <a:spLocks noGrp="1"/>
           </p:cNvSpPr>
           <p:nvPr>
-            <p:ph type="body" idx="3" sz="quarter"/>
+            <p:ph type="body" sz="quarter" idx="3"/>
           </p:nvPr>
         </p:nvSpPr>
         <p:spPr/>
@@ -966,12 +759,7 @@
           <a:lstStyle/>
           <a:p>
             <a:r>
-              <a:t>[AULA E-COMMERCE - MODULO 12 - SLIDE 15]</a:t>
-            </a:r>
-          </a:p>
-          <a:p>
-            <a:r>
-              <a:t>Conclusao do Curso: Revisao geral de todos os modulos integrados (WordPress, WooCommerce, Mercado Livre, Frete, Catalogo e Checkout) comemorando a conclusao da loja virtual.</a:t>
+              <a:t>Passo a passo no painel: mostrar onde fica o menu lateral de Plugins e o botao 'Adicionar Novo' que conecta ao repositorio oficial.</a:t>
             </a:r>
           </a:p>
         </p:txBody>
@@ -983,12 +771,17 @@
             <a:spLocks noGrp="1"/>
           </p:cNvSpPr>
           <p:nvPr>
-            <p:ph type="sldNum" idx="5" sz="quarter"/>
+            <p:ph type="sldNum" sz="quarter" idx="5"/>
           </p:nvPr>
         </p:nvSpPr>
         <p:spPr/>
       </p:sp>
     </p:spTree>
+    <p:extLst>
+      <p:ext uri="{BB962C8B-B14F-4D97-AF65-F5344CB8AC3E}">
+        <p14:creationId xmlns:p14="http://schemas.microsoft.com/office/powerpoint/2010/main" val="2955988526"/>
+      </p:ext>
+    </p:extLst>
   </p:cSld>
   <p:clrMapOvr>
     <a:masterClrMapping/>
@@ -996,8 +789,8 @@
 </p:notes>
 </file>
 
-<file path=ppt/notesSlides/notesSlide2.xml><?xml version="1.0" encoding="utf-8"?>
-<p:notes xmlns:a="http://schemas.openxmlformats.org/drawingml/2006/main" xmlns:p="http://schemas.openxmlformats.org/presentationml/2006/main" xmlns:r="http://schemas.openxmlformats.org/officeDocument/2006/relationships">
+<file path=ppt/notesSlides/notesSlide3.xml><?xml version="1.0" encoding="utf-8"?>
+<p:notes xmlns:a="http://schemas.openxmlformats.org/drawingml/2006/main" xmlns:r="http://schemas.openxmlformats.org/officeDocument/2006/relationships" xmlns:p="http://schemas.openxmlformats.org/presentationml/2006/main">
   <p:cSld>
     <p:spTree>
       <p:nvGrpSpPr>
@@ -1017,7 +810,7 @@
         <p:nvSpPr>
           <p:cNvPr id="2" name="Slide Image Placeholder 1"/>
           <p:cNvSpPr>
-            <a:spLocks noGrp="1"/>
+            <a:spLocks noGrp="1" noRot="1" noChangeAspect="1"/>
           </p:cNvSpPr>
           <p:nvPr>
             <p:ph type="sldImg" idx="2"/>
@@ -1032,7 +825,7 @@
             <a:spLocks noGrp="1"/>
           </p:cNvSpPr>
           <p:nvPr>
-            <p:ph type="body" idx="3" sz="quarter"/>
+            <p:ph type="body" sz="quarter" idx="3"/>
           </p:nvPr>
         </p:nvSpPr>
         <p:spPr/>
@@ -1041,12 +834,7 @@
           <a:lstStyle/>
           <a:p>
             <a:r>
-              <a:t>[AULA E-COMMERCE - MODULO 12 - SLIDE 2]</a:t>
-            </a:r>
-          </a:p>
-          <a:p>
-            <a:r>
-              <a:t>O Funil de Vendas: Explicar as 6 etapas do funil de conversao no e-commerce (Vitrine, Produto, Carrinho, Checkout, Conclusao e Pos-Venda).</a:t>
+              <a:t>Passo a passo no painel: mostrar onde fica o menu lateral de Plugins e o botao 'Adicionar Novo' que conecta ao repositorio oficial.</a:t>
             </a:r>
           </a:p>
         </p:txBody>
@@ -1058,12 +846,17 @@
             <a:spLocks noGrp="1"/>
           </p:cNvSpPr>
           <p:nvPr>
-            <p:ph type="sldNum" idx="5" sz="quarter"/>
+            <p:ph type="sldNum" sz="quarter" idx="5"/>
           </p:nvPr>
         </p:nvSpPr>
         <p:spPr/>
       </p:sp>
     </p:spTree>
+    <p:extLst>
+      <p:ext uri="{BB962C8B-B14F-4D97-AF65-F5344CB8AC3E}">
+        <p14:creationId xmlns:p14="http://schemas.microsoft.com/office/powerpoint/2010/main" val="4047716467"/>
+      </p:ext>
+    </p:extLst>
   </p:cSld>
   <p:clrMapOvr>
     <a:masterClrMapping/>
@@ -1071,8 +864,8 @@
 </p:notes>
 </file>
 
-<file path=ppt/notesSlides/notesSlide3.xml><?xml version="1.0" encoding="utf-8"?>
-<p:notes xmlns:a="http://schemas.openxmlformats.org/drawingml/2006/main" xmlns:p="http://schemas.openxmlformats.org/presentationml/2006/main" xmlns:r="http://schemas.openxmlformats.org/officeDocument/2006/relationships">
+<file path=ppt/notesSlides/notesSlide4.xml><?xml version="1.0" encoding="utf-8"?>
+<p:notes xmlns:a="http://schemas.openxmlformats.org/drawingml/2006/main" xmlns:r="http://schemas.openxmlformats.org/officeDocument/2006/relationships" xmlns:p="http://schemas.openxmlformats.org/presentationml/2006/main">
   <p:cSld>
     <p:spTree>
       <p:nvGrpSpPr>
@@ -1092,7 +885,7 @@
         <p:nvSpPr>
           <p:cNvPr id="2" name="Slide Image Placeholder 1"/>
           <p:cNvSpPr>
-            <a:spLocks noGrp="1"/>
+            <a:spLocks noGrp="1" noRot="1" noChangeAspect="1"/>
           </p:cNvSpPr>
           <p:nvPr>
             <p:ph type="sldImg" idx="2"/>
@@ -1107,7 +900,7 @@
             <a:spLocks noGrp="1"/>
           </p:cNvSpPr>
           <p:nvPr>
-            <p:ph type="body" idx="3" sz="quarter"/>
+            <p:ph type="body" sz="quarter" idx="3"/>
           </p:nvPr>
         </p:nvSpPr>
         <p:spPr/>
@@ -1116,12 +909,7 @@
           <a:lstStyle/>
           <a:p>
             <a:r>
-              <a:t>[AULA E-COMMERCE - MODULO 12 - SLIDE 3]</a:t>
-            </a:r>
-          </a:p>
-          <a:p>
-            <a:r>
-              <a:t>Etapa 1: A Vitrine: Ensinar a importancia de filtros laterais funcionais (preco, tamanho, cor), busca interna e tempo de carregamento rapido.</a:t>
+              <a:t>Passo a passo no painel: mostrar onde fica o menu lateral de Plugins e o botao 'Adicionar Novo' que conecta ao repositorio oficial.</a:t>
             </a:r>
           </a:p>
         </p:txBody>
@@ -1133,12 +921,17 @@
             <a:spLocks noGrp="1"/>
           </p:cNvSpPr>
           <p:nvPr>
-            <p:ph type="sldNum" idx="5" sz="quarter"/>
+            <p:ph type="sldNum" sz="quarter" idx="5"/>
           </p:nvPr>
         </p:nvSpPr>
         <p:spPr/>
       </p:sp>
     </p:spTree>
+    <p:extLst>
+      <p:ext uri="{BB962C8B-B14F-4D97-AF65-F5344CB8AC3E}">
+        <p14:creationId xmlns:p14="http://schemas.microsoft.com/office/powerpoint/2010/main" val="2963029909"/>
+      </p:ext>
+    </p:extLst>
   </p:cSld>
   <p:clrMapOvr>
     <a:masterClrMapping/>
@@ -1146,8 +939,8 @@
 </p:notes>
 </file>
 
-<file path=ppt/notesSlides/notesSlide4.xml><?xml version="1.0" encoding="utf-8"?>
-<p:notes xmlns:a="http://schemas.openxmlformats.org/drawingml/2006/main" xmlns:p="http://schemas.openxmlformats.org/presentationml/2006/main" xmlns:r="http://schemas.openxmlformats.org/officeDocument/2006/relationships">
+<file path=ppt/notesSlides/notesSlide5.xml><?xml version="1.0" encoding="utf-8"?>
+<p:notes xmlns:a="http://schemas.openxmlformats.org/drawingml/2006/main" xmlns:r="http://schemas.openxmlformats.org/officeDocument/2006/relationships" xmlns:p="http://schemas.openxmlformats.org/presentationml/2006/main">
   <p:cSld>
     <p:spTree>
       <p:nvGrpSpPr>
@@ -1167,7 +960,7 @@
         <p:nvSpPr>
           <p:cNvPr id="2" name="Slide Image Placeholder 1"/>
           <p:cNvSpPr>
-            <a:spLocks noGrp="1"/>
+            <a:spLocks noGrp="1" noRot="1" noChangeAspect="1"/>
           </p:cNvSpPr>
           <p:nvPr>
             <p:ph type="sldImg" idx="2"/>
@@ -1182,7 +975,7 @@
             <a:spLocks noGrp="1"/>
           </p:cNvSpPr>
           <p:nvPr>
-            <p:ph type="body" idx="3" sz="quarter"/>
+            <p:ph type="body" sz="quarter" idx="3"/>
           </p:nvPr>
         </p:nvSpPr>
         <p:spPr/>
@@ -1191,12 +984,7 @@
           <a:lstStyle/>
           <a:p>
             <a:r>
-              <a:t>[AULA E-COMMERCE - MODULO 12 - SLIDE 4]</a:t>
-            </a:r>
-          </a:p>
-          <a:p>
-            <a:r>
-              <a:t>Etapa 2: A Pagina do Produto: Demonstrar a selecao de variacoes (cor/tamanho), a troca automatica de foto e o feedback visual de adicao ao carrinho.</a:t>
+              <a:t>Passo a passo no painel: mostrar onde fica o menu lateral de Plugins e o botao 'Adicionar Novo' que conecta ao repositorio oficial.</a:t>
             </a:r>
           </a:p>
         </p:txBody>
@@ -1208,12 +996,17 @@
             <a:spLocks noGrp="1"/>
           </p:cNvSpPr>
           <p:nvPr>
-            <p:ph type="sldNum" idx="5" sz="quarter"/>
+            <p:ph type="sldNum" sz="quarter" idx="5"/>
           </p:nvPr>
         </p:nvSpPr>
         <p:spPr/>
       </p:sp>
     </p:spTree>
+    <p:extLst>
+      <p:ext uri="{BB962C8B-B14F-4D97-AF65-F5344CB8AC3E}">
+        <p14:creationId xmlns:p14="http://schemas.microsoft.com/office/powerpoint/2010/main" val="1868185833"/>
+      </p:ext>
+    </p:extLst>
   </p:cSld>
   <p:clrMapOvr>
     <a:masterClrMapping/>
@@ -1221,8 +1014,8 @@
 </p:notes>
 </file>
 
-<file path=ppt/notesSlides/notesSlide5.xml><?xml version="1.0" encoding="utf-8"?>
-<p:notes xmlns:a="http://schemas.openxmlformats.org/drawingml/2006/main" xmlns:p="http://schemas.openxmlformats.org/presentationml/2006/main" xmlns:r="http://schemas.openxmlformats.org/officeDocument/2006/relationships">
+<file path=ppt/notesSlides/notesSlide6.xml><?xml version="1.0" encoding="utf-8"?>
+<p:notes xmlns:a="http://schemas.openxmlformats.org/drawingml/2006/main" xmlns:r="http://schemas.openxmlformats.org/officeDocument/2006/relationships" xmlns:p="http://schemas.openxmlformats.org/presentationml/2006/main">
   <p:cSld>
     <p:spTree>
       <p:nvGrpSpPr>
@@ -1242,7 +1035,7 @@
         <p:nvSpPr>
           <p:cNvPr id="2" name="Slide Image Placeholder 1"/>
           <p:cNvSpPr>
-            <a:spLocks noGrp="1"/>
+            <a:spLocks noGrp="1" noRot="1" noChangeAspect="1"/>
           </p:cNvSpPr>
           <p:nvPr>
             <p:ph type="sldImg" idx="2"/>
@@ -1257,7 +1050,7 @@
             <a:spLocks noGrp="1"/>
           </p:cNvSpPr>
           <p:nvPr>
-            <p:ph type="body" idx="3" sz="quarter"/>
+            <p:ph type="body" sz="quarter" idx="3"/>
           </p:nvPr>
         </p:nvSpPr>
         <p:spPr/>
@@ -1266,12 +1059,7 @@
           <a:lstStyle/>
           <a:p>
             <a:r>
-              <a:t>[AULA E-COMMERCE - MODULO 12 - SLIDE 5]</a:t>
-            </a:r>
-          </a:p>
-          <a:p>
-            <a:r>
-              <a:t>Etapa 3: O Carrinho de Compras: Explicar o funcionamento de cupons de desconto, alteracao de quantidade e incentivo de frete gratis.</a:t>
+              <a:t>Passo a passo no painel: mostrar onde fica o menu lateral de Plugins e o botao 'Adicionar Novo' que conecta ao repositorio oficial.</a:t>
             </a:r>
           </a:p>
         </p:txBody>
@@ -1283,12 +1071,17 @@
             <a:spLocks noGrp="1"/>
           </p:cNvSpPr>
           <p:nvPr>
-            <p:ph type="sldNum" idx="5" sz="quarter"/>
+            <p:ph type="sldNum" sz="quarter" idx="5"/>
           </p:nvPr>
         </p:nvSpPr>
         <p:spPr/>
       </p:sp>
     </p:spTree>
+    <p:extLst>
+      <p:ext uri="{BB962C8B-B14F-4D97-AF65-F5344CB8AC3E}">
+        <p14:creationId xmlns:p14="http://schemas.microsoft.com/office/powerpoint/2010/main" val="2850215090"/>
+      </p:ext>
+    </p:extLst>
   </p:cSld>
   <p:clrMapOvr>
     <a:masterClrMapping/>
@@ -1296,8 +1089,8 @@
 </p:notes>
 </file>
 
-<file path=ppt/notesSlides/notesSlide6.xml><?xml version="1.0" encoding="utf-8"?>
-<p:notes xmlns:a="http://schemas.openxmlformats.org/drawingml/2006/main" xmlns:p="http://schemas.openxmlformats.org/presentationml/2006/main" xmlns:r="http://schemas.openxmlformats.org/officeDocument/2006/relationships">
+<file path=ppt/notesSlides/notesSlide7.xml><?xml version="1.0" encoding="utf-8"?>
+<p:notes xmlns:a="http://schemas.openxmlformats.org/drawingml/2006/main" xmlns:r="http://schemas.openxmlformats.org/officeDocument/2006/relationships" xmlns:p="http://schemas.openxmlformats.org/presentationml/2006/main">
   <p:cSld>
     <p:spTree>
       <p:nvGrpSpPr>
@@ -1317,7 +1110,7 @@
         <p:nvSpPr>
           <p:cNvPr id="2" name="Slide Image Placeholder 1"/>
           <p:cNvSpPr>
-            <a:spLocks noGrp="1"/>
+            <a:spLocks noGrp="1" noRot="1" noChangeAspect="1"/>
           </p:cNvSpPr>
           <p:nvPr>
             <p:ph type="sldImg" idx="2"/>
@@ -1332,7 +1125,7 @@
             <a:spLocks noGrp="1"/>
           </p:cNvSpPr>
           <p:nvPr>
-            <p:ph type="body" idx="3" sz="quarter"/>
+            <p:ph type="body" sz="quarter" idx="3"/>
           </p:nvPr>
         </p:nvSpPr>
         <p:spPr/>
@@ -1341,12 +1134,7 @@
           <a:lstStyle/>
           <a:p>
             <a:r>
-              <a:t>[AULA E-COMMERCE - MODULO 12 - SLIDE 6]</a:t>
-            </a:r>
-          </a:p>
-          <a:p>
-            <a:r>
-              <a:t>Etapa 4: O Checkout de Alta Conversao: Ensinar as boas praticas de formulario simples, autocompletar de endereco via CEP e obrigatoriedade do CPF para Nota Fiscal.</a:t>
+              <a:t>Passo a passo no painel: mostrar onde fica o menu lateral de Plugins e o botao 'Adicionar Novo' que conecta ao repositorio oficial.</a:t>
             </a:r>
           </a:p>
         </p:txBody>
@@ -1358,12 +1146,17 @@
             <a:spLocks noGrp="1"/>
           </p:cNvSpPr>
           <p:nvPr>
-            <p:ph type="sldNum" idx="5" sz="quarter"/>
+            <p:ph type="sldNum" sz="quarter" idx="5"/>
           </p:nvPr>
         </p:nvSpPr>
         <p:spPr/>
       </p:sp>
     </p:spTree>
+    <p:extLst>
+      <p:ext uri="{BB962C8B-B14F-4D97-AF65-F5344CB8AC3E}">
+        <p14:creationId xmlns:p14="http://schemas.microsoft.com/office/powerpoint/2010/main" val="3199414791"/>
+      </p:ext>
+    </p:extLst>
   </p:cSld>
   <p:clrMapOvr>
     <a:masterClrMapping/>
@@ -1371,8 +1164,8 @@
 </p:notes>
 </file>
 
-<file path=ppt/notesSlides/notesSlide7.xml><?xml version="1.0" encoding="utf-8"?>
-<p:notes xmlns:a="http://schemas.openxmlformats.org/drawingml/2006/main" xmlns:p="http://schemas.openxmlformats.org/presentationml/2006/main" xmlns:r="http://schemas.openxmlformats.org/officeDocument/2006/relationships">
+<file path=ppt/notesSlides/notesSlide8.xml><?xml version="1.0" encoding="utf-8"?>
+<p:notes xmlns:a="http://schemas.openxmlformats.org/drawingml/2006/main" xmlns:r="http://schemas.openxmlformats.org/officeDocument/2006/relationships" xmlns:p="http://schemas.openxmlformats.org/presentationml/2006/main">
   <p:cSld>
     <p:spTree>
       <p:nvGrpSpPr>
@@ -1392,7 +1185,7 @@
         <p:nvSpPr>
           <p:cNvPr id="2" name="Slide Image Placeholder 1"/>
           <p:cNvSpPr>
-            <a:spLocks noGrp="1"/>
+            <a:spLocks noGrp="1" noRot="1" noChangeAspect="1"/>
           </p:cNvSpPr>
           <p:nvPr>
             <p:ph type="sldImg" idx="2"/>
@@ -1407,7 +1200,7 @@
             <a:spLocks noGrp="1"/>
           </p:cNvSpPr>
           <p:nvPr>
-            <p:ph type="body" idx="3" sz="quarter"/>
+            <p:ph type="body" sz="quarter" idx="3"/>
           </p:nvPr>
         </p:nvSpPr>
         <p:spPr/>
@@ -1416,12 +1209,7 @@
           <a:lstStyle/>
           <a:p>
             <a:r>
-              <a:t>[AULA E-COMMERCE - MODULO 12 - SLIDE 7]</a:t>
-            </a:r>
-          </a:p>
-          <a:p>
-            <a:r>
-              <a:t>Etapa 5: Selecao de Frete no Checkout: Mostrar a atualizacao em tempo real dos valores de frete via AJAX e o recalculo do total do pedido.</a:t>
+              <a:t>Passo a passo no painel: mostrar onde fica o menu lateral de Plugins e o botao 'Adicionar Novo' que conecta ao repositorio oficial.</a:t>
             </a:r>
           </a:p>
         </p:txBody>
@@ -1433,12 +1221,17 @@
             <a:spLocks noGrp="1"/>
           </p:cNvSpPr>
           <p:nvPr>
-            <p:ph type="sldNum" idx="5" sz="quarter"/>
+            <p:ph type="sldNum" sz="quarter" idx="5"/>
           </p:nvPr>
         </p:nvSpPr>
         <p:spPr/>
       </p:sp>
     </p:spTree>
+    <p:extLst>
+      <p:ext uri="{BB962C8B-B14F-4D97-AF65-F5344CB8AC3E}">
+        <p14:creationId xmlns:p14="http://schemas.microsoft.com/office/powerpoint/2010/main" val="1311886355"/>
+      </p:ext>
+    </p:extLst>
   </p:cSld>
   <p:clrMapOvr>
     <a:masterClrMapping/>
@@ -1446,8 +1239,8 @@
 </p:notes>
 </file>
 
-<file path=ppt/notesSlides/notesSlide8.xml><?xml version="1.0" encoding="utf-8"?>
-<p:notes xmlns:a="http://schemas.openxmlformats.org/drawingml/2006/main" xmlns:p="http://schemas.openxmlformats.org/presentationml/2006/main" xmlns:r="http://schemas.openxmlformats.org/officeDocument/2006/relationships">
+<file path=ppt/notesSlides/notesSlide9.xml><?xml version="1.0" encoding="utf-8"?>
+<p:notes xmlns:a="http://schemas.openxmlformats.org/drawingml/2006/main" xmlns:r="http://schemas.openxmlformats.org/officeDocument/2006/relationships" xmlns:p="http://schemas.openxmlformats.org/presentationml/2006/main">
   <p:cSld>
     <p:spTree>
       <p:nvGrpSpPr>
@@ -1467,7 +1260,7 @@
         <p:nvSpPr>
           <p:cNvPr id="2" name="Slide Image Placeholder 1"/>
           <p:cNvSpPr>
-            <a:spLocks noGrp="1"/>
+            <a:spLocks noGrp="1" noRot="1" noChangeAspect="1"/>
           </p:cNvSpPr>
           <p:nvPr>
             <p:ph type="sldImg" idx="2"/>
@@ -1482,7 +1275,7 @@
             <a:spLocks noGrp="1"/>
           </p:cNvSpPr>
           <p:nvPr>
-            <p:ph type="body" idx="3" sz="quarter"/>
+            <p:ph type="body" sz="quarter" idx="3"/>
           </p:nvPr>
         </p:nvSpPr>
         <p:spPr/>
@@ -1491,12 +1284,7 @@
           <a:lstStyle/>
           <a:p>
             <a:r>
-              <a:t>[AULA E-COMMERCE - MODULO 12 - SLIDE 8]</a:t>
-            </a:r>
-          </a:p>
-          <a:p>
-            <a:r>
-              <a:t>Etapa 6: Pagamento via Pix: Apresentar o QR Code dinamico, Pix Copia e Cola, tempo limite e confirmacao automatica via WebHook do Mercado Pago.</a:t>
+              <a:t>Passo a passo no painel: mostrar onde fica o menu lateral de Plugins e o botao 'Adicionar Novo' que conecta ao repositorio oficial.</a:t>
             </a:r>
           </a:p>
         </p:txBody>
@@ -1508,87 +1296,17 @@
             <a:spLocks noGrp="1"/>
           </p:cNvSpPr>
           <p:nvPr>
-            <p:ph type="sldNum" idx="5" sz="quarter"/>
+            <p:ph type="sldNum" sz="quarter" idx="5"/>
           </p:nvPr>
         </p:nvSpPr>
         <p:spPr/>
       </p:sp>
     </p:spTree>
-  </p:cSld>
-  <p:clrMapOvr>
-    <a:masterClrMapping/>
-  </p:clrMapOvr>
-</p:notes>
-</file>
-
-<file path=ppt/notesSlides/notesSlide9.xml><?xml version="1.0" encoding="utf-8"?>
-<p:notes xmlns:a="http://schemas.openxmlformats.org/drawingml/2006/main" xmlns:p="http://schemas.openxmlformats.org/presentationml/2006/main" xmlns:r="http://schemas.openxmlformats.org/officeDocument/2006/relationships">
-  <p:cSld>
-    <p:spTree>
-      <p:nvGrpSpPr>
-        <p:cNvPr id="1" name=""/>
-        <p:cNvGrpSpPr/>
-        <p:nvPr/>
-      </p:nvGrpSpPr>
-      <p:grpSpPr>
-        <a:xfrm>
-          <a:off x="0" y="0"/>
-          <a:ext cx="0" cy="0"/>
-          <a:chOff x="0" y="0"/>
-          <a:chExt cx="0" cy="0"/>
-        </a:xfrm>
-      </p:grpSpPr>
-      <p:sp>
-        <p:nvSpPr>
-          <p:cNvPr id="2" name="Slide Image Placeholder 1"/>
-          <p:cNvSpPr>
-            <a:spLocks noGrp="1"/>
-          </p:cNvSpPr>
-          <p:nvPr>
-            <p:ph type="sldImg" idx="2"/>
-          </p:nvPr>
-        </p:nvSpPr>
-        <p:spPr/>
-      </p:sp>
-      <p:sp>
-        <p:nvSpPr>
-          <p:cNvPr id="3" name="Notes Placeholder 2"/>
-          <p:cNvSpPr>
-            <a:spLocks noGrp="1"/>
-          </p:cNvSpPr>
-          <p:nvPr>
-            <p:ph type="body" idx="3" sz="quarter"/>
-          </p:nvPr>
-        </p:nvSpPr>
-        <p:spPr/>
-        <p:txBody>
-          <a:bodyPr/>
-          <a:lstStyle/>
-          <a:p>
-            <a:r>
-              <a:t>[AULA E-COMMERCE - MODULO 12 - SLIDE 9]</a:t>
-            </a:r>
-          </a:p>
-          <a:p>
-            <a:r>
-              <a:t>Etapa 7: Pagamento com Cartao: Explicar a tokenizacao segura, parcelamento com juros pelo gateway e protecao antifraude integrada.</a:t>
-            </a:r>
-          </a:p>
-        </p:txBody>
-      </p:sp>
-      <p:sp>
-        <p:nvSpPr>
-          <p:cNvPr id="4" name="Slide Number Placeholder 3"/>
-          <p:cNvSpPr>
-            <a:spLocks noGrp="1"/>
-          </p:cNvSpPr>
-          <p:nvPr>
-            <p:ph type="sldNum" idx="5" sz="quarter"/>
-          </p:nvPr>
-        </p:nvSpPr>
-        <p:spPr/>
-      </p:sp>
-    </p:spTree>
+    <p:extLst>
+      <p:ext uri="{BB962C8B-B14F-4D97-AF65-F5344CB8AC3E}">
+        <p14:creationId xmlns:p14="http://schemas.microsoft.com/office/powerpoint/2010/main" val="653674156"/>
+      </p:ext>
+    </p:extLst>
   </p:cSld>
   <p:clrMapOvr>
     <a:masterClrMapping/>
@@ -1634,10 +1352,9 @@
           <a:lstStyle/>
           <a:p>
             <a:r>
-              <a:rPr lang="en-US" smtClean="0"/>
+              <a:rPr lang="en-US"/>
               <a:t>Click to edit Master title style</a:t>
             </a:r>
-            <a:endParaRPr lang="en-US"/>
           </a:p>
         </p:txBody>
       </p:sp>
@@ -1753,10 +1470,9 @@
           </a:lstStyle>
           <a:p>
             <a:r>
-              <a:rPr lang="en-US" smtClean="0"/>
+              <a:rPr lang="en-US"/>
               <a:t>Click to edit Master subtitle style</a:t>
             </a:r>
-            <a:endParaRPr lang="en-US"/>
           </a:p>
         </p:txBody>
       </p:sp>
@@ -1777,7 +1493,7 @@
           <a:p>
             <a:fld id="{5BCAD085-E8A6-8845-BD4E-CB4CCA059FC4}" type="datetimeFigureOut">
               <a:rPr lang="en-US" smtClean="0"/>
-              <a:t>1/27/13</a:t>
+              <a:t>10/22/2026</a:t>
             </a:fld>
             <a:endParaRPr lang="en-US"/>
           </a:p>
@@ -1819,7 +1535,7 @@
           <a:p>
             <a:fld id="{C1FF6DA9-008F-8B48-92A6-B652298478BF}" type="slidenum">
               <a:rPr lang="en-US" smtClean="0"/>
-              <a:t>‹#›</a:t>
+              <a:t>‹nº›</a:t>
             </a:fld>
             <a:endParaRPr lang="en-US"/>
           </a:p>
@@ -1871,10 +1587,9 @@
           <a:lstStyle/>
           <a:p>
             <a:r>
-              <a:rPr lang="en-US" smtClean="0"/>
+              <a:rPr lang="en-US"/>
               <a:t>Click to edit Master title style</a:t>
             </a:r>
-            <a:endParaRPr lang="en-US"/>
           </a:p>
         </p:txBody>
       </p:sp>
@@ -1895,38 +1610,37 @@
           <a:p>
             <a:pPr lvl="0"/>
             <a:r>
-              <a:rPr lang="en-US" smtClean="0"/>
+              <a:rPr lang="en-US"/>
               <a:t>Click to edit Master text styles</a:t>
             </a:r>
           </a:p>
           <a:p>
             <a:pPr lvl="1"/>
             <a:r>
-              <a:rPr lang="en-US" smtClean="0"/>
+              <a:rPr lang="en-US"/>
               <a:t>Second level</a:t>
             </a:r>
           </a:p>
           <a:p>
             <a:pPr lvl="2"/>
             <a:r>
-              <a:rPr lang="en-US" smtClean="0"/>
+              <a:rPr lang="en-US"/>
               <a:t>Third level</a:t>
             </a:r>
           </a:p>
           <a:p>
             <a:pPr lvl="3"/>
             <a:r>
-              <a:rPr lang="en-US" smtClean="0"/>
+              <a:rPr lang="en-US"/>
               <a:t>Fourth level</a:t>
             </a:r>
           </a:p>
           <a:p>
             <a:pPr lvl="4"/>
             <a:r>
-              <a:rPr lang="en-US" smtClean="0"/>
+              <a:rPr lang="en-US"/>
               <a:t>Fifth level</a:t>
             </a:r>
-            <a:endParaRPr lang="en-US"/>
           </a:p>
         </p:txBody>
       </p:sp>
@@ -1947,7 +1661,7 @@
           <a:p>
             <a:fld id="{5BCAD085-E8A6-8845-BD4E-CB4CCA059FC4}" type="datetimeFigureOut">
               <a:rPr lang="en-US" smtClean="0"/>
-              <a:t>1/27/13</a:t>
+              <a:t>10/22/2026</a:t>
             </a:fld>
             <a:endParaRPr lang="en-US"/>
           </a:p>
@@ -1989,7 +1703,7 @@
           <a:p>
             <a:fld id="{C1FF6DA9-008F-8B48-92A6-B652298478BF}" type="slidenum">
               <a:rPr lang="en-US" smtClean="0"/>
-              <a:t>‹#›</a:t>
+              <a:t>‹nº›</a:t>
             </a:fld>
             <a:endParaRPr lang="en-US"/>
           </a:p>
@@ -2046,10 +1760,9 @@
           <a:lstStyle/>
           <a:p>
             <a:r>
-              <a:rPr lang="en-US" smtClean="0"/>
+              <a:rPr lang="en-US"/>
               <a:t>Click to edit Master title style</a:t>
             </a:r>
-            <a:endParaRPr lang="en-US"/>
           </a:p>
         </p:txBody>
       </p:sp>
@@ -2075,38 +1788,37 @@
           <a:p>
             <a:pPr lvl="0"/>
             <a:r>
-              <a:rPr lang="en-US" smtClean="0"/>
+              <a:rPr lang="en-US"/>
               <a:t>Click to edit Master text styles</a:t>
             </a:r>
           </a:p>
           <a:p>
             <a:pPr lvl="1"/>
             <a:r>
-              <a:rPr lang="en-US" smtClean="0"/>
+              <a:rPr lang="en-US"/>
               <a:t>Second level</a:t>
             </a:r>
           </a:p>
           <a:p>
             <a:pPr lvl="2"/>
             <a:r>
-              <a:rPr lang="en-US" smtClean="0"/>
+              <a:rPr lang="en-US"/>
               <a:t>Third level</a:t>
             </a:r>
           </a:p>
           <a:p>
             <a:pPr lvl="3"/>
             <a:r>
-              <a:rPr lang="en-US" smtClean="0"/>
+              <a:rPr lang="en-US"/>
               <a:t>Fourth level</a:t>
             </a:r>
           </a:p>
           <a:p>
             <a:pPr lvl="4"/>
             <a:r>
-              <a:rPr lang="en-US" smtClean="0"/>
+              <a:rPr lang="en-US"/>
               <a:t>Fifth level</a:t>
             </a:r>
-            <a:endParaRPr lang="en-US"/>
           </a:p>
         </p:txBody>
       </p:sp>
@@ -2127,7 +1839,7 @@
           <a:p>
             <a:fld id="{5BCAD085-E8A6-8845-BD4E-CB4CCA059FC4}" type="datetimeFigureOut">
               <a:rPr lang="en-US" smtClean="0"/>
-              <a:t>1/27/13</a:t>
+              <a:t>10/22/2026</a:t>
             </a:fld>
             <a:endParaRPr lang="en-US"/>
           </a:p>
@@ -2169,7 +1881,7 @@
           <a:p>
             <a:fld id="{C1FF6DA9-008F-8B48-92A6-B652298478BF}" type="slidenum">
               <a:rPr lang="en-US" smtClean="0"/>
-              <a:t>‹#›</a:t>
+              <a:t>‹nº›</a:t>
             </a:fld>
             <a:endParaRPr lang="en-US"/>
           </a:p>
@@ -2221,10 +1933,9 @@
           <a:lstStyle/>
           <a:p>
             <a:r>
-              <a:rPr lang="en-US" smtClean="0"/>
+              <a:rPr lang="en-US"/>
               <a:t>Click to edit Master title style</a:t>
             </a:r>
-            <a:endParaRPr lang="en-US"/>
           </a:p>
         </p:txBody>
       </p:sp>
@@ -2245,38 +1956,37 @@
           <a:p>
             <a:pPr lvl="0"/>
             <a:r>
-              <a:rPr lang="en-US" smtClean="0"/>
+              <a:rPr lang="en-US"/>
               <a:t>Click to edit Master text styles</a:t>
             </a:r>
           </a:p>
           <a:p>
             <a:pPr lvl="1"/>
             <a:r>
-              <a:rPr lang="en-US" smtClean="0"/>
+              <a:rPr lang="en-US"/>
               <a:t>Second level</a:t>
             </a:r>
           </a:p>
           <a:p>
             <a:pPr lvl="2"/>
             <a:r>
-              <a:rPr lang="en-US" smtClean="0"/>
+              <a:rPr lang="en-US"/>
               <a:t>Third level</a:t>
             </a:r>
           </a:p>
           <a:p>
             <a:pPr lvl="3"/>
             <a:r>
-              <a:rPr lang="en-US" smtClean="0"/>
+              <a:rPr lang="en-US"/>
               <a:t>Fourth level</a:t>
             </a:r>
           </a:p>
           <a:p>
             <a:pPr lvl="4"/>
             <a:r>
-              <a:rPr lang="en-US" smtClean="0"/>
+              <a:rPr lang="en-US"/>
               <a:t>Fifth level</a:t>
             </a:r>
-            <a:endParaRPr lang="en-US"/>
           </a:p>
         </p:txBody>
       </p:sp>
@@ -2297,7 +2007,7 @@
           <a:p>
             <a:fld id="{5BCAD085-E8A6-8845-BD4E-CB4CCA059FC4}" type="datetimeFigureOut">
               <a:rPr lang="en-US" smtClean="0"/>
-              <a:t>1/27/13</a:t>
+              <a:t>10/22/2026</a:t>
             </a:fld>
             <a:endParaRPr lang="en-US"/>
           </a:p>
@@ -2339,7 +2049,7 @@
           <a:p>
             <a:fld id="{C1FF6DA9-008F-8B48-92A6-B652298478BF}" type="slidenum">
               <a:rPr lang="en-US" smtClean="0"/>
-              <a:t>‹#›</a:t>
+              <a:t>‹nº›</a:t>
             </a:fld>
             <a:endParaRPr lang="en-US"/>
           </a:p>
@@ -2400,10 +2110,9 @@
           </a:lstStyle>
           <a:p>
             <a:r>
-              <a:rPr lang="en-US" smtClean="0"/>
+              <a:rPr lang="en-US"/>
               <a:t>Click to edit Master title style</a:t>
             </a:r>
-            <a:endParaRPr lang="en-US"/>
           </a:p>
         </p:txBody>
       </p:sp>
@@ -2520,7 +2229,7 @@
           <a:p>
             <a:pPr lvl="0"/>
             <a:r>
-              <a:rPr lang="en-US" smtClean="0"/>
+              <a:rPr lang="en-US"/>
               <a:t>Click to edit Master text styles</a:t>
             </a:r>
           </a:p>
@@ -2543,7 +2252,7 @@
           <a:p>
             <a:fld id="{5BCAD085-E8A6-8845-BD4E-CB4CCA059FC4}" type="datetimeFigureOut">
               <a:rPr lang="en-US" smtClean="0"/>
-              <a:t>1/27/13</a:t>
+              <a:t>10/22/2026</a:t>
             </a:fld>
             <a:endParaRPr lang="en-US"/>
           </a:p>
@@ -2585,7 +2294,7 @@
           <a:p>
             <a:fld id="{C1FF6DA9-008F-8B48-92A6-B652298478BF}" type="slidenum">
               <a:rPr lang="en-US" smtClean="0"/>
-              <a:t>‹#›</a:t>
+              <a:t>‹nº›</a:t>
             </a:fld>
             <a:endParaRPr lang="en-US"/>
           </a:p>
@@ -2637,10 +2346,9 @@
           <a:lstStyle/>
           <a:p>
             <a:r>
-              <a:rPr lang="en-US" smtClean="0"/>
+              <a:rPr lang="en-US"/>
               <a:t>Click to edit Master title style</a:t>
             </a:r>
-            <a:endParaRPr lang="en-US"/>
           </a:p>
         </p:txBody>
       </p:sp>
@@ -2694,38 +2402,37 @@
           <a:p>
             <a:pPr lvl="0"/>
             <a:r>
-              <a:rPr lang="en-US" smtClean="0"/>
+              <a:rPr lang="en-US"/>
               <a:t>Click to edit Master text styles</a:t>
             </a:r>
           </a:p>
           <a:p>
             <a:pPr lvl="1"/>
             <a:r>
-              <a:rPr lang="en-US" smtClean="0"/>
+              <a:rPr lang="en-US"/>
               <a:t>Second level</a:t>
             </a:r>
           </a:p>
           <a:p>
             <a:pPr lvl="2"/>
             <a:r>
-              <a:rPr lang="en-US" smtClean="0"/>
+              <a:rPr lang="en-US"/>
               <a:t>Third level</a:t>
             </a:r>
           </a:p>
           <a:p>
             <a:pPr lvl="3"/>
             <a:r>
-              <a:rPr lang="en-US" smtClean="0"/>
+              <a:rPr lang="en-US"/>
               <a:t>Fourth level</a:t>
             </a:r>
           </a:p>
           <a:p>
             <a:pPr lvl="4"/>
             <a:r>
-              <a:rPr lang="en-US" smtClean="0"/>
+              <a:rPr lang="en-US"/>
               <a:t>Fifth level</a:t>
             </a:r>
-            <a:endParaRPr lang="en-US"/>
           </a:p>
         </p:txBody>
       </p:sp>
@@ -2779,38 +2486,37 @@
           <a:p>
             <a:pPr lvl="0"/>
             <a:r>
-              <a:rPr lang="en-US" smtClean="0"/>
+              <a:rPr lang="en-US"/>
               <a:t>Click to edit Master text styles</a:t>
             </a:r>
           </a:p>
           <a:p>
             <a:pPr lvl="1"/>
             <a:r>
-              <a:rPr lang="en-US" smtClean="0"/>
+              <a:rPr lang="en-US"/>
               <a:t>Second level</a:t>
             </a:r>
           </a:p>
           <a:p>
             <a:pPr lvl="2"/>
             <a:r>
-              <a:rPr lang="en-US" smtClean="0"/>
+              <a:rPr lang="en-US"/>
               <a:t>Third level</a:t>
             </a:r>
           </a:p>
           <a:p>
             <a:pPr lvl="3"/>
             <a:r>
-              <a:rPr lang="en-US" smtClean="0"/>
+              <a:rPr lang="en-US"/>
               <a:t>Fourth level</a:t>
             </a:r>
           </a:p>
           <a:p>
             <a:pPr lvl="4"/>
             <a:r>
-              <a:rPr lang="en-US" smtClean="0"/>
+              <a:rPr lang="en-US"/>
               <a:t>Fifth level</a:t>
             </a:r>
-            <a:endParaRPr lang="en-US"/>
           </a:p>
         </p:txBody>
       </p:sp>
@@ -2831,7 +2537,7 @@
           <a:p>
             <a:fld id="{5BCAD085-E8A6-8845-BD4E-CB4CCA059FC4}" type="datetimeFigureOut">
               <a:rPr lang="en-US" smtClean="0"/>
-              <a:t>1/27/13</a:t>
+              <a:t>10/22/2026</a:t>
             </a:fld>
             <a:endParaRPr lang="en-US"/>
           </a:p>
@@ -2873,7 +2579,7 @@
           <a:p>
             <a:fld id="{C1FF6DA9-008F-8B48-92A6-B652298478BF}" type="slidenum">
               <a:rPr lang="en-US" smtClean="0"/>
-              <a:t>‹#›</a:t>
+              <a:t>‹nº›</a:t>
             </a:fld>
             <a:endParaRPr lang="en-US"/>
           </a:p>
@@ -2929,10 +2635,9 @@
           </a:lstStyle>
           <a:p>
             <a:r>
-              <a:rPr lang="en-US" smtClean="0"/>
+              <a:rPr lang="en-US"/>
               <a:t>Click to edit Master title style</a:t>
             </a:r>
-            <a:endParaRPr lang="en-US"/>
           </a:p>
         </p:txBody>
       </p:sp>
@@ -2995,7 +2700,7 @@
           <a:p>
             <a:pPr lvl="0"/>
             <a:r>
-              <a:rPr lang="en-US" smtClean="0"/>
+              <a:rPr lang="en-US"/>
               <a:t>Click to edit Master text styles</a:t>
             </a:r>
           </a:p>
@@ -3051,38 +2756,37 @@
           <a:p>
             <a:pPr lvl="0"/>
             <a:r>
-              <a:rPr lang="en-US" smtClean="0"/>
+              <a:rPr lang="en-US"/>
               <a:t>Click to edit Master text styles</a:t>
             </a:r>
           </a:p>
           <a:p>
             <a:pPr lvl="1"/>
             <a:r>
-              <a:rPr lang="en-US" smtClean="0"/>
+              <a:rPr lang="en-US"/>
               <a:t>Second level</a:t>
             </a:r>
           </a:p>
           <a:p>
             <a:pPr lvl="2"/>
             <a:r>
-              <a:rPr lang="en-US" smtClean="0"/>
+              <a:rPr lang="en-US"/>
               <a:t>Third level</a:t>
             </a:r>
           </a:p>
           <a:p>
             <a:pPr lvl="3"/>
             <a:r>
-              <a:rPr lang="en-US" smtClean="0"/>
+              <a:rPr lang="en-US"/>
               <a:t>Fourth level</a:t>
             </a:r>
           </a:p>
           <a:p>
             <a:pPr lvl="4"/>
             <a:r>
-              <a:rPr lang="en-US" smtClean="0"/>
+              <a:rPr lang="en-US"/>
               <a:t>Fifth level</a:t>
             </a:r>
-            <a:endParaRPr lang="en-US"/>
           </a:p>
         </p:txBody>
       </p:sp>
@@ -3145,7 +2849,7 @@
           <a:p>
             <a:pPr lvl="0"/>
             <a:r>
-              <a:rPr lang="en-US" smtClean="0"/>
+              <a:rPr lang="en-US"/>
               <a:t>Click to edit Master text styles</a:t>
             </a:r>
           </a:p>
@@ -3201,38 +2905,37 @@
           <a:p>
             <a:pPr lvl="0"/>
             <a:r>
-              <a:rPr lang="en-US" smtClean="0"/>
+              <a:rPr lang="en-US"/>
               <a:t>Click to edit Master text styles</a:t>
             </a:r>
           </a:p>
           <a:p>
             <a:pPr lvl="1"/>
             <a:r>
-              <a:rPr lang="en-US" smtClean="0"/>
+              <a:rPr lang="en-US"/>
               <a:t>Second level</a:t>
             </a:r>
           </a:p>
           <a:p>
             <a:pPr lvl="2"/>
             <a:r>
-              <a:rPr lang="en-US" smtClean="0"/>
+              <a:rPr lang="en-US"/>
               <a:t>Third level</a:t>
             </a:r>
           </a:p>
           <a:p>
             <a:pPr lvl="3"/>
             <a:r>
-              <a:rPr lang="en-US" smtClean="0"/>
+              <a:rPr lang="en-US"/>
               <a:t>Fourth level</a:t>
             </a:r>
           </a:p>
           <a:p>
             <a:pPr lvl="4"/>
             <a:r>
-              <a:rPr lang="en-US" smtClean="0"/>
+              <a:rPr lang="en-US"/>
               <a:t>Fifth level</a:t>
             </a:r>
-            <a:endParaRPr lang="en-US"/>
           </a:p>
         </p:txBody>
       </p:sp>
@@ -3253,7 +2956,7 @@
           <a:p>
             <a:fld id="{5BCAD085-E8A6-8845-BD4E-CB4CCA059FC4}" type="datetimeFigureOut">
               <a:rPr lang="en-US" smtClean="0"/>
-              <a:t>1/27/13</a:t>
+              <a:t>10/22/2026</a:t>
             </a:fld>
             <a:endParaRPr lang="en-US"/>
           </a:p>
@@ -3295,7 +2998,7 @@
           <a:p>
             <a:fld id="{C1FF6DA9-008F-8B48-92A6-B652298478BF}" type="slidenum">
               <a:rPr lang="en-US" smtClean="0"/>
-              <a:t>‹#›</a:t>
+              <a:t>‹nº›</a:t>
             </a:fld>
             <a:endParaRPr lang="en-US"/>
           </a:p>
@@ -3347,10 +3050,9 @@
           <a:lstStyle/>
           <a:p>
             <a:r>
-              <a:rPr lang="en-US" smtClean="0"/>
+              <a:rPr lang="en-US"/>
               <a:t>Click to edit Master title style</a:t>
             </a:r>
-            <a:endParaRPr lang="en-US"/>
           </a:p>
         </p:txBody>
       </p:sp>
@@ -3371,7 +3073,7 @@
           <a:p>
             <a:fld id="{5BCAD085-E8A6-8845-BD4E-CB4CCA059FC4}" type="datetimeFigureOut">
               <a:rPr lang="en-US" smtClean="0"/>
-              <a:t>1/27/13</a:t>
+              <a:t>10/22/2026</a:t>
             </a:fld>
             <a:endParaRPr lang="en-US"/>
           </a:p>
@@ -3413,7 +3115,7 @@
           <a:p>
             <a:fld id="{C1FF6DA9-008F-8B48-92A6-B652298478BF}" type="slidenum">
               <a:rPr lang="en-US" smtClean="0"/>
-              <a:t>‹#›</a:t>
+              <a:t>‹nº›</a:t>
             </a:fld>
             <a:endParaRPr lang="en-US"/>
           </a:p>
@@ -3466,7 +3168,7 @@
           <a:p>
             <a:fld id="{5BCAD085-E8A6-8845-BD4E-CB4CCA059FC4}" type="datetimeFigureOut">
               <a:rPr lang="en-US" smtClean="0"/>
-              <a:t>1/27/13</a:t>
+              <a:t>10/22/2026</a:t>
             </a:fld>
             <a:endParaRPr lang="en-US"/>
           </a:p>
@@ -3508,7 +3210,7 @@
           <a:p>
             <a:fld id="{C1FF6DA9-008F-8B48-92A6-B652298478BF}" type="slidenum">
               <a:rPr lang="en-US" smtClean="0"/>
-              <a:t>‹#›</a:t>
+              <a:t>‹nº›</a:t>
             </a:fld>
             <a:endParaRPr lang="en-US"/>
           </a:p>
@@ -3569,10 +3271,9 @@
           </a:lstStyle>
           <a:p>
             <a:r>
-              <a:rPr lang="en-US" smtClean="0"/>
+              <a:rPr lang="en-US"/>
               <a:t>Click to edit Master title style</a:t>
             </a:r>
-            <a:endParaRPr lang="en-US"/>
           </a:p>
         </p:txBody>
       </p:sp>
@@ -3626,38 +3327,37 @@
           <a:p>
             <a:pPr lvl="0"/>
             <a:r>
-              <a:rPr lang="en-US" smtClean="0"/>
+              <a:rPr lang="en-US"/>
               <a:t>Click to edit Master text styles</a:t>
             </a:r>
           </a:p>
           <a:p>
             <a:pPr lvl="1"/>
             <a:r>
-              <a:rPr lang="en-US" smtClean="0"/>
+              <a:rPr lang="en-US"/>
               <a:t>Second level</a:t>
             </a:r>
           </a:p>
           <a:p>
             <a:pPr lvl="2"/>
             <a:r>
-              <a:rPr lang="en-US" smtClean="0"/>
+              <a:rPr lang="en-US"/>
               <a:t>Third level</a:t>
             </a:r>
           </a:p>
           <a:p>
             <a:pPr lvl="3"/>
             <a:r>
-              <a:rPr lang="en-US" smtClean="0"/>
+              <a:rPr lang="en-US"/>
               <a:t>Fourth level</a:t>
             </a:r>
           </a:p>
           <a:p>
             <a:pPr lvl="4"/>
             <a:r>
-              <a:rPr lang="en-US" smtClean="0"/>
+              <a:rPr lang="en-US"/>
               <a:t>Fifth level</a:t>
             </a:r>
-            <a:endParaRPr lang="en-US"/>
           </a:p>
         </p:txBody>
       </p:sp>
@@ -3720,7 +3420,7 @@
           <a:p>
             <a:pPr lvl="0"/>
             <a:r>
-              <a:rPr lang="en-US" smtClean="0"/>
+              <a:rPr lang="en-US"/>
               <a:t>Click to edit Master text styles</a:t>
             </a:r>
           </a:p>
@@ -3743,7 +3443,7 @@
           <a:p>
             <a:fld id="{5BCAD085-E8A6-8845-BD4E-CB4CCA059FC4}" type="datetimeFigureOut">
               <a:rPr lang="en-US" smtClean="0"/>
-              <a:t>1/27/13</a:t>
+              <a:t>10/22/2026</a:t>
             </a:fld>
             <a:endParaRPr lang="en-US"/>
           </a:p>
@@ -3785,7 +3485,7 @@
           <a:p>
             <a:fld id="{C1FF6DA9-008F-8B48-92A6-B652298478BF}" type="slidenum">
               <a:rPr lang="en-US" smtClean="0"/>
-              <a:t>‹#›</a:t>
+              <a:t>‹nº›</a:t>
             </a:fld>
             <a:endParaRPr lang="en-US"/>
           </a:p>
@@ -3846,10 +3546,9 @@
           </a:lstStyle>
           <a:p>
             <a:r>
-              <a:rPr lang="en-US" smtClean="0"/>
+              <a:rPr lang="en-US"/>
               <a:t>Click to edit Master title style</a:t>
             </a:r>
-            <a:endParaRPr lang="en-US"/>
           </a:p>
         </p:txBody>
       </p:sp>
@@ -3973,7 +3672,7 @@
           <a:p>
             <a:pPr lvl="0"/>
             <a:r>
-              <a:rPr lang="en-US" smtClean="0"/>
+              <a:rPr lang="en-US"/>
               <a:t>Click to edit Master text styles</a:t>
             </a:r>
           </a:p>
@@ -3996,7 +3695,7 @@
           <a:p>
             <a:fld id="{5BCAD085-E8A6-8845-BD4E-CB4CCA059FC4}" type="datetimeFigureOut">
               <a:rPr lang="en-US" smtClean="0"/>
-              <a:t>1/27/13</a:t>
+              <a:t>10/22/2026</a:t>
             </a:fld>
             <a:endParaRPr lang="en-US"/>
           </a:p>
@@ -4038,7 +3737,7 @@
           <a:p>
             <a:fld id="{C1FF6DA9-008F-8B48-92A6-B652298478BF}" type="slidenum">
               <a:rPr lang="en-US" smtClean="0"/>
-              <a:t>‹#›</a:t>
+              <a:t>‹nº›</a:t>
             </a:fld>
             <a:endParaRPr lang="en-US"/>
           </a:p>
@@ -4105,10 +3804,9 @@
           <a:lstStyle/>
           <a:p>
             <a:r>
-              <a:rPr lang="en-US" smtClean="0"/>
+              <a:rPr lang="en-US"/>
               <a:t>Click to edit Master title style</a:t>
             </a:r>
-            <a:endParaRPr lang="en-US"/>
           </a:p>
         </p:txBody>
       </p:sp>
@@ -4139,38 +3837,37 @@
           <a:p>
             <a:pPr lvl="0"/>
             <a:r>
-              <a:rPr lang="en-US" smtClean="0"/>
+              <a:rPr lang="en-US"/>
               <a:t>Click to edit Master text styles</a:t>
             </a:r>
           </a:p>
           <a:p>
             <a:pPr lvl="1"/>
             <a:r>
-              <a:rPr lang="en-US" smtClean="0"/>
+              <a:rPr lang="en-US"/>
               <a:t>Second level</a:t>
             </a:r>
           </a:p>
           <a:p>
             <a:pPr lvl="2"/>
             <a:r>
-              <a:rPr lang="en-US" smtClean="0"/>
+              <a:rPr lang="en-US"/>
               <a:t>Third level</a:t>
             </a:r>
           </a:p>
           <a:p>
             <a:pPr lvl="3"/>
             <a:r>
-              <a:rPr lang="en-US" smtClean="0"/>
+              <a:rPr lang="en-US"/>
               <a:t>Fourth level</a:t>
             </a:r>
           </a:p>
           <a:p>
             <a:pPr lvl="4"/>
             <a:r>
-              <a:rPr lang="en-US" smtClean="0"/>
+              <a:rPr lang="en-US"/>
               <a:t>Fifth level</a:t>
             </a:r>
-            <a:endParaRPr lang="en-US"/>
           </a:p>
         </p:txBody>
       </p:sp>
@@ -4209,7 +3906,7 @@
           <a:p>
             <a:fld id="{5BCAD085-E8A6-8845-BD4E-CB4CCA059FC4}" type="datetimeFigureOut">
               <a:rPr lang="en-US" smtClean="0"/>
-              <a:t>1/27/13</a:t>
+              <a:t>10/22/2026</a:t>
             </a:fld>
             <a:endParaRPr lang="en-US"/>
           </a:p>
@@ -4287,7 +3984,7 @@
           <a:p>
             <a:fld id="{C1FF6DA9-008F-8B48-92A6-B652298478BF}" type="slidenum">
               <a:rPr lang="en-US" smtClean="0"/>
-              <a:t>‹#›</a:t>
+              <a:t>‹nº›</a:t>
             </a:fld>
             <a:endParaRPr lang="en-US"/>
           </a:p>
@@ -4568,7 +4265,7 @@
 </file>
 
 <file path=ppt/slides/slide1.xml><?xml version="1.0" encoding="utf-8"?>
-<p:sld xmlns:a="http://schemas.openxmlformats.org/drawingml/2006/main" xmlns:p="http://schemas.openxmlformats.org/presentationml/2006/main" xmlns:r="http://schemas.openxmlformats.org/officeDocument/2006/relationships">
+<p:sld xmlns:a="http://schemas.openxmlformats.org/drawingml/2006/main" xmlns:r="http://schemas.openxmlformats.org/officeDocument/2006/relationships" xmlns:p="http://schemas.openxmlformats.org/presentationml/2006/main">
   <p:cSld>
     <p:spTree>
       <p:nvGrpSpPr>
@@ -4576,32 +4273,145 @@
         <p:cNvGrpSpPr/>
         <p:nvPr/>
       </p:nvGrpSpPr>
-      <p:grpSpPr/>
+      <p:grpSpPr>
+        <a:xfrm>
+          <a:off x="0" y="0"/>
+          <a:ext cx="0" cy="0"/>
+          <a:chOff x="0" y="0"/>
+          <a:chExt cx="0" cy="0"/>
+        </a:xfrm>
+      </p:grpSpPr>
+      <p:sp>
+        <p:nvSpPr>
+          <p:cNvPr id="6" name="Retângulo 5">
+            <a:extLst>
+              <a:ext uri="{FF2B5EF4-FFF2-40B4-BE49-F238E27FC236}">
+                <a16:creationId xmlns:a16="http://schemas.microsoft.com/office/drawing/2014/main" id="{8DC220E4-CDF2-B2FC-8D4C-30090C957200}"/>
+              </a:ext>
+            </a:extLst>
+          </p:cNvPr>
+          <p:cNvSpPr/>
+          <p:nvPr/>
+        </p:nvSpPr>
+        <p:spPr>
+          <a:xfrm>
+            <a:off x="0" y="0"/>
+            <a:ext cx="12192000" cy="6858000"/>
+          </a:xfrm>
+          <a:prstGeom prst="rect">
+            <a:avLst/>
+          </a:prstGeom>
+          <a:solidFill>
+            <a:srgbClr val="0F172A"/>
+          </a:solidFill>
+        </p:spPr>
+        <p:style>
+          <a:lnRef idx="2">
+            <a:schemeClr val="accent1">
+              <a:shade val="15000"/>
+            </a:schemeClr>
+          </a:lnRef>
+          <a:fillRef idx="1">
+            <a:schemeClr val="accent1"/>
+          </a:fillRef>
+          <a:effectRef idx="0">
+            <a:schemeClr val="accent1"/>
+          </a:effectRef>
+          <a:fontRef idx="minor">
+            <a:schemeClr val="lt1"/>
+          </a:fontRef>
+        </p:style>
+        <p:txBody>
+          <a:bodyPr rtlCol="0" anchor="ctr"/>
+          <a:lstStyle/>
+          <a:p>
+            <a:pPr algn="ctr"/>
+            <a:endParaRPr lang="en-US"/>
+          </a:p>
+        </p:txBody>
+      </p:sp>
       <p:pic>
         <p:nvPicPr>
-          <p:cNvPr id="2" name="Picture 1" descr="mod12_slide1.png"/>
+          <p:cNvPr id="7" name="Imagem 6">
+            <a:extLst>
+              <a:ext uri="{FF2B5EF4-FFF2-40B4-BE49-F238E27FC236}">
+                <a16:creationId xmlns:a16="http://schemas.microsoft.com/office/drawing/2014/main" id="{956821BE-3E35-15A7-63DF-8D59721AC977}"/>
+              </a:ext>
+            </a:extLst>
+          </p:cNvPr>
           <p:cNvPicPr>
             <a:picLocks noChangeAspect="1"/>
           </p:cNvPicPr>
           <p:nvPr/>
         </p:nvPicPr>
         <p:blipFill>
-          <a:blip r:embed="rId2"/>
+          <a:blip r:embed="rId3"/>
           <a:stretch>
             <a:fillRect/>
           </a:stretch>
         </p:blipFill>
         <p:spPr>
           <a:xfrm>
-            <a:off x="0" y="0"/>
-            <a:ext cx="12191695" cy="6858000"/>
+            <a:off x="0" y="182880"/>
+            <a:ext cx="12192000" cy="6492240"/>
           </a:xfrm>
           <a:prstGeom prst="rect">
             <a:avLst/>
           </a:prstGeom>
         </p:spPr>
       </p:pic>
+      <p:sp>
+        <p:nvSpPr>
+          <p:cNvPr id="8" name="Seta: para Baixo 7">
+            <a:extLst>
+              <a:ext uri="{FF2B5EF4-FFF2-40B4-BE49-F238E27FC236}">
+                <a16:creationId xmlns:a16="http://schemas.microsoft.com/office/drawing/2014/main" id="{490BA9FA-5169-EA2F-4CEC-C49AD179C573}"/>
+              </a:ext>
+            </a:extLst>
+          </p:cNvPr>
+          <p:cNvSpPr/>
+          <p:nvPr/>
+        </p:nvSpPr>
+        <p:spPr>
+          <a:xfrm rot="7644991">
+            <a:off x="989876" y="795643"/>
+            <a:ext cx="1716066" cy="2242159"/>
+          </a:xfrm>
+          <a:prstGeom prst="downArrow">
+            <a:avLst/>
+          </a:prstGeom>
+        </p:spPr>
+        <p:style>
+          <a:lnRef idx="2">
+            <a:schemeClr val="accent6">
+              <a:shade val="15000"/>
+            </a:schemeClr>
+          </a:lnRef>
+          <a:fillRef idx="1">
+            <a:schemeClr val="accent6"/>
+          </a:fillRef>
+          <a:effectRef idx="0">
+            <a:schemeClr val="accent6"/>
+          </a:effectRef>
+          <a:fontRef idx="minor">
+            <a:schemeClr val="lt1"/>
+          </a:fontRef>
+        </p:style>
+        <p:txBody>
+          <a:bodyPr rtlCol="0" anchor="ctr"/>
+          <a:lstStyle/>
+          <a:p>
+            <a:pPr algn="ctr"/>
+            <a:endParaRPr lang="en-US"/>
+          </a:p>
+        </p:txBody>
+      </p:sp>
     </p:spTree>
+    <p:extLst>
+      <p:ext uri="{BB962C8B-B14F-4D97-AF65-F5344CB8AC3E}">
+        <p14:creationId xmlns:p14="http://schemas.microsoft.com/office/powerpoint/2010/main" val="4061384336"/>
+      </p:ext>
+    </p:extLst>
   </p:cSld>
   <p:clrMapOvr>
     <a:masterClrMapping/>
@@ -4610,7 +4420,7 @@
 </file>
 
 <file path=ppt/slides/slide10.xml><?xml version="1.0" encoding="utf-8"?>
-<p:sld xmlns:a="http://schemas.openxmlformats.org/drawingml/2006/main" xmlns:p="http://schemas.openxmlformats.org/presentationml/2006/main" xmlns:r="http://schemas.openxmlformats.org/officeDocument/2006/relationships">
+<p:sld xmlns:a="http://schemas.openxmlformats.org/drawingml/2006/main" xmlns:r="http://schemas.openxmlformats.org/officeDocument/2006/relationships" xmlns:p="http://schemas.openxmlformats.org/presentationml/2006/main">
   <p:cSld>
     <p:spTree>
       <p:nvGrpSpPr>
@@ -4618,17 +4428,79 @@
         <p:cNvGrpSpPr/>
         <p:nvPr/>
       </p:nvGrpSpPr>
-      <p:grpSpPr/>
+      <p:grpSpPr>
+        <a:xfrm>
+          <a:off x="0" y="0"/>
+          <a:ext cx="0" cy="0"/>
+          <a:chOff x="0" y="0"/>
+          <a:chExt cx="0" cy="0"/>
+        </a:xfrm>
+      </p:grpSpPr>
+      <p:sp>
+        <p:nvSpPr>
+          <p:cNvPr id="6" name="Retângulo 5">
+            <a:extLst>
+              <a:ext uri="{FF2B5EF4-FFF2-40B4-BE49-F238E27FC236}">
+                <a16:creationId xmlns:a16="http://schemas.microsoft.com/office/drawing/2014/main" id="{8DC220E4-CDF2-B2FC-8D4C-30090C957200}"/>
+              </a:ext>
+            </a:extLst>
+          </p:cNvPr>
+          <p:cNvSpPr/>
+          <p:nvPr/>
+        </p:nvSpPr>
+        <p:spPr>
+          <a:xfrm>
+            <a:off x="0" y="0"/>
+            <a:ext cx="12192000" cy="6858000"/>
+          </a:xfrm>
+          <a:prstGeom prst="rect">
+            <a:avLst/>
+          </a:prstGeom>
+          <a:solidFill>
+            <a:srgbClr val="0F172A"/>
+          </a:solidFill>
+        </p:spPr>
+        <p:style>
+          <a:lnRef idx="2">
+            <a:schemeClr val="accent1">
+              <a:shade val="15000"/>
+            </a:schemeClr>
+          </a:lnRef>
+          <a:fillRef idx="1">
+            <a:schemeClr val="accent1"/>
+          </a:fillRef>
+          <a:effectRef idx="0">
+            <a:schemeClr val="accent1"/>
+          </a:effectRef>
+          <a:fontRef idx="minor">
+            <a:schemeClr val="lt1"/>
+          </a:fontRef>
+        </p:style>
+        <p:txBody>
+          <a:bodyPr rtlCol="0" anchor="ctr"/>
+          <a:lstStyle/>
+          <a:p>
+            <a:pPr algn="ctr"/>
+            <a:endParaRPr lang="en-US"/>
+          </a:p>
+        </p:txBody>
+      </p:sp>
       <p:pic>
         <p:nvPicPr>
-          <p:cNvPr id="2" name="Picture 1" descr="mod12_slide10.png"/>
+          <p:cNvPr id="4" name="Imagem 3">
+            <a:extLst>
+              <a:ext uri="{FF2B5EF4-FFF2-40B4-BE49-F238E27FC236}">
+                <a16:creationId xmlns:a16="http://schemas.microsoft.com/office/drawing/2014/main" id="{F742B8BE-EE11-F360-34F3-89780A00057E}"/>
+              </a:ext>
+            </a:extLst>
+          </p:cNvPr>
           <p:cNvPicPr>
             <a:picLocks noChangeAspect="1"/>
           </p:cNvPicPr>
           <p:nvPr/>
         </p:nvPicPr>
         <p:blipFill>
-          <a:blip r:embed="rId2"/>
+          <a:blip r:embed="rId3"/>
           <a:stretch>
             <a:fillRect/>
           </a:stretch>
@@ -4636,7 +4508,7 @@
         <p:spPr>
           <a:xfrm>
             <a:off x="0" y="0"/>
-            <a:ext cx="12191695" cy="6858000"/>
+            <a:ext cx="12192000" cy="6858000"/>
           </a:xfrm>
           <a:prstGeom prst="rect">
             <a:avLst/>
@@ -4644,6 +4516,11 @@
         </p:spPr>
       </p:pic>
     </p:spTree>
+    <p:extLst>
+      <p:ext uri="{BB962C8B-B14F-4D97-AF65-F5344CB8AC3E}">
+        <p14:creationId xmlns:p14="http://schemas.microsoft.com/office/powerpoint/2010/main" val="3603526121"/>
+      </p:ext>
+    </p:extLst>
   </p:cSld>
   <p:clrMapOvr>
     <a:masterClrMapping/>
@@ -4652,7 +4529,7 @@
 </file>
 
 <file path=ppt/slides/slide11.xml><?xml version="1.0" encoding="utf-8"?>
-<p:sld xmlns:a="http://schemas.openxmlformats.org/drawingml/2006/main" xmlns:p="http://schemas.openxmlformats.org/presentationml/2006/main" xmlns:r="http://schemas.openxmlformats.org/officeDocument/2006/relationships">
+<p:sld xmlns:a="http://schemas.openxmlformats.org/drawingml/2006/main" xmlns:r="http://schemas.openxmlformats.org/officeDocument/2006/relationships" xmlns:p="http://schemas.openxmlformats.org/presentationml/2006/main">
   <p:cSld>
     <p:spTree>
       <p:nvGrpSpPr>
@@ -4660,17 +4537,79 @@
         <p:cNvGrpSpPr/>
         <p:nvPr/>
       </p:nvGrpSpPr>
-      <p:grpSpPr/>
+      <p:grpSpPr>
+        <a:xfrm>
+          <a:off x="0" y="0"/>
+          <a:ext cx="0" cy="0"/>
+          <a:chOff x="0" y="0"/>
+          <a:chExt cx="0" cy="0"/>
+        </a:xfrm>
+      </p:grpSpPr>
+      <p:sp>
+        <p:nvSpPr>
+          <p:cNvPr id="6" name="Retângulo 5">
+            <a:extLst>
+              <a:ext uri="{FF2B5EF4-FFF2-40B4-BE49-F238E27FC236}">
+                <a16:creationId xmlns:a16="http://schemas.microsoft.com/office/drawing/2014/main" id="{8DC220E4-CDF2-B2FC-8D4C-30090C957200}"/>
+              </a:ext>
+            </a:extLst>
+          </p:cNvPr>
+          <p:cNvSpPr/>
+          <p:nvPr/>
+        </p:nvSpPr>
+        <p:spPr>
+          <a:xfrm>
+            <a:off x="0" y="0"/>
+            <a:ext cx="12192000" cy="6858000"/>
+          </a:xfrm>
+          <a:prstGeom prst="rect">
+            <a:avLst/>
+          </a:prstGeom>
+          <a:solidFill>
+            <a:srgbClr val="0F172A"/>
+          </a:solidFill>
+        </p:spPr>
+        <p:style>
+          <a:lnRef idx="2">
+            <a:schemeClr val="accent1">
+              <a:shade val="15000"/>
+            </a:schemeClr>
+          </a:lnRef>
+          <a:fillRef idx="1">
+            <a:schemeClr val="accent1"/>
+          </a:fillRef>
+          <a:effectRef idx="0">
+            <a:schemeClr val="accent1"/>
+          </a:effectRef>
+          <a:fontRef idx="minor">
+            <a:schemeClr val="lt1"/>
+          </a:fontRef>
+        </p:style>
+        <p:txBody>
+          <a:bodyPr rtlCol="0" anchor="ctr"/>
+          <a:lstStyle/>
+          <a:p>
+            <a:pPr algn="ctr"/>
+            <a:endParaRPr lang="en-US"/>
+          </a:p>
+        </p:txBody>
+      </p:sp>
       <p:pic>
         <p:nvPicPr>
-          <p:cNvPr id="2" name="Picture 1" descr="mod12_slide11.png"/>
+          <p:cNvPr id="7" name="Imagem 6">
+            <a:extLst>
+              <a:ext uri="{FF2B5EF4-FFF2-40B4-BE49-F238E27FC236}">
+                <a16:creationId xmlns:a16="http://schemas.microsoft.com/office/drawing/2014/main" id="{D971B63B-E13F-1408-7D3C-E66C19D1F7F7}"/>
+              </a:ext>
+            </a:extLst>
+          </p:cNvPr>
           <p:cNvPicPr>
             <a:picLocks noChangeAspect="1"/>
           </p:cNvPicPr>
           <p:nvPr/>
         </p:nvPicPr>
         <p:blipFill>
-          <a:blip r:embed="rId2"/>
+          <a:blip r:embed="rId3"/>
           <a:stretch>
             <a:fillRect/>
           </a:stretch>
@@ -4678,7 +4617,7 @@
         <p:spPr>
           <a:xfrm>
             <a:off x="0" y="0"/>
-            <a:ext cx="12191695" cy="6858000"/>
+            <a:ext cx="12192000" cy="6858000"/>
           </a:xfrm>
           <a:prstGeom prst="rect">
             <a:avLst/>
@@ -4686,6 +4625,11 @@
         </p:spPr>
       </p:pic>
     </p:spTree>
+    <p:extLst>
+      <p:ext uri="{BB962C8B-B14F-4D97-AF65-F5344CB8AC3E}">
+        <p14:creationId xmlns:p14="http://schemas.microsoft.com/office/powerpoint/2010/main" val="571988336"/>
+      </p:ext>
+    </p:extLst>
   </p:cSld>
   <p:clrMapOvr>
     <a:masterClrMapping/>
@@ -4694,7 +4638,7 @@
 </file>
 
 <file path=ppt/slides/slide12.xml><?xml version="1.0" encoding="utf-8"?>
-<p:sld xmlns:a="http://schemas.openxmlformats.org/drawingml/2006/main" xmlns:p="http://schemas.openxmlformats.org/presentationml/2006/main" xmlns:r="http://schemas.openxmlformats.org/officeDocument/2006/relationships">
+<p:sld xmlns:a="http://schemas.openxmlformats.org/drawingml/2006/main" xmlns:r="http://schemas.openxmlformats.org/officeDocument/2006/relationships" xmlns:p="http://schemas.openxmlformats.org/presentationml/2006/main">
   <p:cSld>
     <p:spTree>
       <p:nvGrpSpPr>
@@ -4702,17 +4646,79 @@
         <p:cNvGrpSpPr/>
         <p:nvPr/>
       </p:nvGrpSpPr>
-      <p:grpSpPr/>
+      <p:grpSpPr>
+        <a:xfrm>
+          <a:off x="0" y="0"/>
+          <a:ext cx="0" cy="0"/>
+          <a:chOff x="0" y="0"/>
+          <a:chExt cx="0" cy="0"/>
+        </a:xfrm>
+      </p:grpSpPr>
+      <p:sp>
+        <p:nvSpPr>
+          <p:cNvPr id="6" name="Retângulo 5">
+            <a:extLst>
+              <a:ext uri="{FF2B5EF4-FFF2-40B4-BE49-F238E27FC236}">
+                <a16:creationId xmlns:a16="http://schemas.microsoft.com/office/drawing/2014/main" id="{8DC220E4-CDF2-B2FC-8D4C-30090C957200}"/>
+              </a:ext>
+            </a:extLst>
+          </p:cNvPr>
+          <p:cNvSpPr/>
+          <p:nvPr/>
+        </p:nvSpPr>
+        <p:spPr>
+          <a:xfrm>
+            <a:off x="0" y="0"/>
+            <a:ext cx="12192000" cy="6858000"/>
+          </a:xfrm>
+          <a:prstGeom prst="rect">
+            <a:avLst/>
+          </a:prstGeom>
+          <a:solidFill>
+            <a:srgbClr val="0F172A"/>
+          </a:solidFill>
+        </p:spPr>
+        <p:style>
+          <a:lnRef idx="2">
+            <a:schemeClr val="accent1">
+              <a:shade val="15000"/>
+            </a:schemeClr>
+          </a:lnRef>
+          <a:fillRef idx="1">
+            <a:schemeClr val="accent1"/>
+          </a:fillRef>
+          <a:effectRef idx="0">
+            <a:schemeClr val="accent1"/>
+          </a:effectRef>
+          <a:fontRef idx="minor">
+            <a:schemeClr val="lt1"/>
+          </a:fontRef>
+        </p:style>
+        <p:txBody>
+          <a:bodyPr rtlCol="0" anchor="ctr"/>
+          <a:lstStyle/>
+          <a:p>
+            <a:pPr algn="ctr"/>
+            <a:endParaRPr lang="en-US"/>
+          </a:p>
+        </p:txBody>
+      </p:sp>
       <p:pic>
         <p:nvPicPr>
-          <p:cNvPr id="2" name="Picture 1" descr="mod12_slide12.png"/>
+          <p:cNvPr id="3" name="Imagem 2">
+            <a:extLst>
+              <a:ext uri="{FF2B5EF4-FFF2-40B4-BE49-F238E27FC236}">
+                <a16:creationId xmlns:a16="http://schemas.microsoft.com/office/drawing/2014/main" id="{0EFEA9F5-3497-D7D9-839F-9E7E4FD920A3}"/>
+              </a:ext>
+            </a:extLst>
+          </p:cNvPr>
           <p:cNvPicPr>
             <a:picLocks noChangeAspect="1"/>
           </p:cNvPicPr>
           <p:nvPr/>
         </p:nvPicPr>
         <p:blipFill>
-          <a:blip r:embed="rId2"/>
+          <a:blip r:embed="rId3"/>
           <a:stretch>
             <a:fillRect/>
           </a:stretch>
@@ -4720,7 +4726,7 @@
         <p:spPr>
           <a:xfrm>
             <a:off x="0" y="0"/>
-            <a:ext cx="12191695" cy="6858000"/>
+            <a:ext cx="12192000" cy="6858000"/>
           </a:xfrm>
           <a:prstGeom prst="rect">
             <a:avLst/>
@@ -4728,6 +4734,11 @@
         </p:spPr>
       </p:pic>
     </p:spTree>
+    <p:extLst>
+      <p:ext uri="{BB962C8B-B14F-4D97-AF65-F5344CB8AC3E}">
+        <p14:creationId xmlns:p14="http://schemas.microsoft.com/office/powerpoint/2010/main" val="2820038814"/>
+      </p:ext>
+    </p:extLst>
   </p:cSld>
   <p:clrMapOvr>
     <a:masterClrMapping/>
@@ -4736,7 +4747,7 @@
 </file>
 
 <file path=ppt/slides/slide13.xml><?xml version="1.0" encoding="utf-8"?>
-<p:sld xmlns:a="http://schemas.openxmlformats.org/drawingml/2006/main" xmlns:p="http://schemas.openxmlformats.org/presentationml/2006/main" xmlns:r="http://schemas.openxmlformats.org/officeDocument/2006/relationships">
+<p:sld xmlns:a="http://schemas.openxmlformats.org/drawingml/2006/main" xmlns:r="http://schemas.openxmlformats.org/officeDocument/2006/relationships" xmlns:p="http://schemas.openxmlformats.org/presentationml/2006/main">
   <p:cSld>
     <p:spTree>
       <p:nvGrpSpPr>
@@ -4744,17 +4755,79 @@
         <p:cNvGrpSpPr/>
         <p:nvPr/>
       </p:nvGrpSpPr>
-      <p:grpSpPr/>
+      <p:grpSpPr>
+        <a:xfrm>
+          <a:off x="0" y="0"/>
+          <a:ext cx="0" cy="0"/>
+          <a:chOff x="0" y="0"/>
+          <a:chExt cx="0" cy="0"/>
+        </a:xfrm>
+      </p:grpSpPr>
+      <p:sp>
+        <p:nvSpPr>
+          <p:cNvPr id="6" name="Retângulo 5">
+            <a:extLst>
+              <a:ext uri="{FF2B5EF4-FFF2-40B4-BE49-F238E27FC236}">
+                <a16:creationId xmlns:a16="http://schemas.microsoft.com/office/drawing/2014/main" id="{8DC220E4-CDF2-B2FC-8D4C-30090C957200}"/>
+              </a:ext>
+            </a:extLst>
+          </p:cNvPr>
+          <p:cNvSpPr/>
+          <p:nvPr/>
+        </p:nvSpPr>
+        <p:spPr>
+          <a:xfrm>
+            <a:off x="0" y="0"/>
+            <a:ext cx="12192000" cy="6858000"/>
+          </a:xfrm>
+          <a:prstGeom prst="rect">
+            <a:avLst/>
+          </a:prstGeom>
+          <a:solidFill>
+            <a:srgbClr val="0F172A"/>
+          </a:solidFill>
+        </p:spPr>
+        <p:style>
+          <a:lnRef idx="2">
+            <a:schemeClr val="accent1">
+              <a:shade val="15000"/>
+            </a:schemeClr>
+          </a:lnRef>
+          <a:fillRef idx="1">
+            <a:schemeClr val="accent1"/>
+          </a:fillRef>
+          <a:effectRef idx="0">
+            <a:schemeClr val="accent1"/>
+          </a:effectRef>
+          <a:fontRef idx="minor">
+            <a:schemeClr val="lt1"/>
+          </a:fontRef>
+        </p:style>
+        <p:txBody>
+          <a:bodyPr rtlCol="0" anchor="ctr"/>
+          <a:lstStyle/>
+          <a:p>
+            <a:pPr algn="ctr"/>
+            <a:endParaRPr lang="en-US"/>
+          </a:p>
+        </p:txBody>
+      </p:sp>
       <p:pic>
         <p:nvPicPr>
-          <p:cNvPr id="2" name="Picture 1" descr="mod12_slide13.png"/>
+          <p:cNvPr id="3" name="Imagem 2">
+            <a:extLst>
+              <a:ext uri="{FF2B5EF4-FFF2-40B4-BE49-F238E27FC236}">
+                <a16:creationId xmlns:a16="http://schemas.microsoft.com/office/drawing/2014/main" id="{C8542297-3ACA-0DF9-4F33-FFE3556E4338}"/>
+              </a:ext>
+            </a:extLst>
+          </p:cNvPr>
           <p:cNvPicPr>
             <a:picLocks noChangeAspect="1"/>
           </p:cNvPicPr>
           <p:nvPr/>
         </p:nvPicPr>
         <p:blipFill>
-          <a:blip r:embed="rId2"/>
+          <a:blip r:embed="rId3"/>
           <a:stretch>
             <a:fillRect/>
           </a:stretch>
@@ -4762,7 +4835,7 @@
         <p:spPr>
           <a:xfrm>
             <a:off x="0" y="0"/>
-            <a:ext cx="12191695" cy="6858000"/>
+            <a:ext cx="12192000" cy="6858000"/>
           </a:xfrm>
           <a:prstGeom prst="rect">
             <a:avLst/>
@@ -4770,6 +4843,11 @@
         </p:spPr>
       </p:pic>
     </p:spTree>
+    <p:extLst>
+      <p:ext uri="{BB962C8B-B14F-4D97-AF65-F5344CB8AC3E}">
+        <p14:creationId xmlns:p14="http://schemas.microsoft.com/office/powerpoint/2010/main" val="2296172386"/>
+      </p:ext>
+    </p:extLst>
   </p:cSld>
   <p:clrMapOvr>
     <a:masterClrMapping/>
@@ -4778,7 +4856,7 @@
 </file>
 
 <file path=ppt/slides/slide14.xml><?xml version="1.0" encoding="utf-8"?>
-<p:sld xmlns:a="http://schemas.openxmlformats.org/drawingml/2006/main" xmlns:p="http://schemas.openxmlformats.org/presentationml/2006/main" xmlns:r="http://schemas.openxmlformats.org/officeDocument/2006/relationships">
+<p:sld xmlns:a="http://schemas.openxmlformats.org/drawingml/2006/main" xmlns:r="http://schemas.openxmlformats.org/officeDocument/2006/relationships" xmlns:p="http://schemas.openxmlformats.org/presentationml/2006/main">
   <p:cSld>
     <p:spTree>
       <p:nvGrpSpPr>
@@ -4786,74 +4864,145 @@
         <p:cNvGrpSpPr/>
         <p:nvPr/>
       </p:nvGrpSpPr>
-      <p:grpSpPr/>
+      <p:grpSpPr>
+        <a:xfrm>
+          <a:off x="0" y="0"/>
+          <a:ext cx="0" cy="0"/>
+          <a:chOff x="0" y="0"/>
+          <a:chExt cx="0" cy="0"/>
+        </a:xfrm>
+      </p:grpSpPr>
+      <p:sp>
+        <p:nvSpPr>
+          <p:cNvPr id="6" name="Retângulo 5">
+            <a:extLst>
+              <a:ext uri="{FF2B5EF4-FFF2-40B4-BE49-F238E27FC236}">
+                <a16:creationId xmlns:a16="http://schemas.microsoft.com/office/drawing/2014/main" id="{8DC220E4-CDF2-B2FC-8D4C-30090C957200}"/>
+              </a:ext>
+            </a:extLst>
+          </p:cNvPr>
+          <p:cNvSpPr/>
+          <p:nvPr/>
+        </p:nvSpPr>
+        <p:spPr>
+          <a:xfrm>
+            <a:off x="0" y="0"/>
+            <a:ext cx="12192000" cy="6858000"/>
+          </a:xfrm>
+          <a:prstGeom prst="rect">
+            <a:avLst/>
+          </a:prstGeom>
+          <a:solidFill>
+            <a:srgbClr val="0F172A"/>
+          </a:solidFill>
+        </p:spPr>
+        <p:style>
+          <a:lnRef idx="2">
+            <a:schemeClr val="accent1">
+              <a:shade val="15000"/>
+            </a:schemeClr>
+          </a:lnRef>
+          <a:fillRef idx="1">
+            <a:schemeClr val="accent1"/>
+          </a:fillRef>
+          <a:effectRef idx="0">
+            <a:schemeClr val="accent1"/>
+          </a:effectRef>
+          <a:fontRef idx="minor">
+            <a:schemeClr val="lt1"/>
+          </a:fontRef>
+        </p:style>
+        <p:txBody>
+          <a:bodyPr rtlCol="0" anchor="ctr"/>
+          <a:lstStyle/>
+          <a:p>
+            <a:pPr algn="ctr"/>
+            <a:endParaRPr lang="en-US"/>
+          </a:p>
+        </p:txBody>
+      </p:sp>
       <p:pic>
         <p:nvPicPr>
-          <p:cNvPr id="2" name="Picture 1" descr="mod12_slide14.png"/>
+          <p:cNvPr id="3" name="Imagem 2">
+            <a:extLst>
+              <a:ext uri="{FF2B5EF4-FFF2-40B4-BE49-F238E27FC236}">
+                <a16:creationId xmlns:a16="http://schemas.microsoft.com/office/drawing/2014/main" id="{5428E9FD-98FC-390D-4684-ED416AB38A66}"/>
+              </a:ext>
+            </a:extLst>
+          </p:cNvPr>
           <p:cNvPicPr>
             <a:picLocks noChangeAspect="1"/>
           </p:cNvPicPr>
           <p:nvPr/>
         </p:nvPicPr>
         <p:blipFill>
-          <a:blip r:embed="rId2"/>
+          <a:blip r:embed="rId3"/>
           <a:stretch>
             <a:fillRect/>
           </a:stretch>
         </p:blipFill>
         <p:spPr>
           <a:xfrm>
-            <a:off x="0" y="0"/>
-            <a:ext cx="12191695" cy="6858000"/>
+            <a:off x="0" y="182880"/>
+            <a:ext cx="12192000" cy="6492240"/>
           </a:xfrm>
           <a:prstGeom prst="rect">
             <a:avLst/>
           </a:prstGeom>
         </p:spPr>
       </p:pic>
-    </p:spTree>
-  </p:cSld>
-  <p:clrMapOvr>
-    <a:masterClrMapping/>
-  </p:clrMapOvr>
-</p:sld>
-</file>
-
-<file path=ppt/slides/slide15.xml><?xml version="1.0" encoding="utf-8"?>
-<p:sld xmlns:a="http://schemas.openxmlformats.org/drawingml/2006/main" xmlns:p="http://schemas.openxmlformats.org/presentationml/2006/main" xmlns:r="http://schemas.openxmlformats.org/officeDocument/2006/relationships">
-  <p:cSld>
-    <p:spTree>
-      <p:nvGrpSpPr>
-        <p:cNvPr id="1" name=""/>
-        <p:cNvGrpSpPr/>
-        <p:nvPr/>
-      </p:nvGrpSpPr>
-      <p:grpSpPr/>
-      <p:pic>
-        <p:nvPicPr>
-          <p:cNvPr id="2" name="Picture 1" descr="mod12_slide15.png"/>
-          <p:cNvPicPr>
-            <a:picLocks noChangeAspect="1"/>
-          </p:cNvPicPr>
+      <p:sp>
+        <p:nvSpPr>
+          <p:cNvPr id="4" name="Seta: para Baixo 3">
+            <a:extLst>
+              <a:ext uri="{FF2B5EF4-FFF2-40B4-BE49-F238E27FC236}">
+                <a16:creationId xmlns:a16="http://schemas.microsoft.com/office/drawing/2014/main" id="{CAABE4A3-4987-F064-A9F6-9C8A812ECA4F}"/>
+              </a:ext>
+            </a:extLst>
+          </p:cNvPr>
+          <p:cNvSpPr/>
           <p:nvPr/>
-        </p:nvPicPr>
-        <p:blipFill>
-          <a:blip r:embed="rId2"/>
-          <a:stretch>
-            <a:fillRect/>
-          </a:stretch>
-        </p:blipFill>
+        </p:nvSpPr>
         <p:spPr>
-          <a:xfrm>
-            <a:off x="0" y="0"/>
-            <a:ext cx="12191695" cy="6858000"/>
+          <a:xfrm rot="9226030">
+            <a:off x="119294" y="3227671"/>
+            <a:ext cx="1716066" cy="2242159"/>
           </a:xfrm>
-          <a:prstGeom prst="rect">
+          <a:prstGeom prst="downArrow">
             <a:avLst/>
           </a:prstGeom>
         </p:spPr>
-      </p:pic>
+        <p:style>
+          <a:lnRef idx="2">
+            <a:schemeClr val="accent6">
+              <a:shade val="15000"/>
+            </a:schemeClr>
+          </a:lnRef>
+          <a:fillRef idx="1">
+            <a:schemeClr val="accent6"/>
+          </a:fillRef>
+          <a:effectRef idx="0">
+            <a:schemeClr val="accent6"/>
+          </a:effectRef>
+          <a:fontRef idx="minor">
+            <a:schemeClr val="lt1"/>
+          </a:fontRef>
+        </p:style>
+        <p:txBody>
+          <a:bodyPr rtlCol="0" anchor="ctr"/>
+          <a:lstStyle/>
+          <a:p>
+            <a:pPr algn="ctr"/>
+            <a:endParaRPr lang="en-US"/>
+          </a:p>
+        </p:txBody>
+      </p:sp>
     </p:spTree>
+    <p:extLst>
+      <p:ext uri="{BB962C8B-B14F-4D97-AF65-F5344CB8AC3E}">
+        <p14:creationId xmlns:p14="http://schemas.microsoft.com/office/powerpoint/2010/main" val="3550607127"/>
+      </p:ext>
+    </p:extLst>
   </p:cSld>
   <p:clrMapOvr>
     <a:masterClrMapping/>
@@ -4862,7 +5011,7 @@
 </file>
 
 <file path=ppt/slides/slide2.xml><?xml version="1.0" encoding="utf-8"?>
-<p:sld xmlns:a="http://schemas.openxmlformats.org/drawingml/2006/main" xmlns:p="http://schemas.openxmlformats.org/presentationml/2006/main" xmlns:r="http://schemas.openxmlformats.org/officeDocument/2006/relationships">
+<p:sld xmlns:a="http://schemas.openxmlformats.org/drawingml/2006/main" xmlns:r="http://schemas.openxmlformats.org/officeDocument/2006/relationships" xmlns:p="http://schemas.openxmlformats.org/presentationml/2006/main">
   <p:cSld>
     <p:spTree>
       <p:nvGrpSpPr>
@@ -4870,17 +5019,79 @@
         <p:cNvGrpSpPr/>
         <p:nvPr/>
       </p:nvGrpSpPr>
-      <p:grpSpPr/>
+      <p:grpSpPr>
+        <a:xfrm>
+          <a:off x="0" y="0"/>
+          <a:ext cx="0" cy="0"/>
+          <a:chOff x="0" y="0"/>
+          <a:chExt cx="0" cy="0"/>
+        </a:xfrm>
+      </p:grpSpPr>
+      <p:sp>
+        <p:nvSpPr>
+          <p:cNvPr id="6" name="Retângulo 5">
+            <a:extLst>
+              <a:ext uri="{FF2B5EF4-FFF2-40B4-BE49-F238E27FC236}">
+                <a16:creationId xmlns:a16="http://schemas.microsoft.com/office/drawing/2014/main" id="{8DC220E4-CDF2-B2FC-8D4C-30090C957200}"/>
+              </a:ext>
+            </a:extLst>
+          </p:cNvPr>
+          <p:cNvSpPr/>
+          <p:nvPr/>
+        </p:nvSpPr>
+        <p:spPr>
+          <a:xfrm>
+            <a:off x="0" y="0"/>
+            <a:ext cx="12192000" cy="6858000"/>
+          </a:xfrm>
+          <a:prstGeom prst="rect">
+            <a:avLst/>
+          </a:prstGeom>
+          <a:solidFill>
+            <a:srgbClr val="0F172A"/>
+          </a:solidFill>
+        </p:spPr>
+        <p:style>
+          <a:lnRef idx="2">
+            <a:schemeClr val="accent1">
+              <a:shade val="15000"/>
+            </a:schemeClr>
+          </a:lnRef>
+          <a:fillRef idx="1">
+            <a:schemeClr val="accent1"/>
+          </a:fillRef>
+          <a:effectRef idx="0">
+            <a:schemeClr val="accent1"/>
+          </a:effectRef>
+          <a:fontRef idx="minor">
+            <a:schemeClr val="lt1"/>
+          </a:fontRef>
+        </p:style>
+        <p:txBody>
+          <a:bodyPr rtlCol="0" anchor="ctr"/>
+          <a:lstStyle/>
+          <a:p>
+            <a:pPr algn="ctr"/>
+            <a:endParaRPr lang="en-US"/>
+          </a:p>
+        </p:txBody>
+      </p:sp>
       <p:pic>
         <p:nvPicPr>
-          <p:cNvPr id="2" name="Picture 1" descr="mod12_slide2.png"/>
+          <p:cNvPr id="4" name="Imagem 3">
+            <a:extLst>
+              <a:ext uri="{FF2B5EF4-FFF2-40B4-BE49-F238E27FC236}">
+                <a16:creationId xmlns:a16="http://schemas.microsoft.com/office/drawing/2014/main" id="{B922F121-9A90-4DAD-B4D3-1AD71F3D3302}"/>
+              </a:ext>
+            </a:extLst>
+          </p:cNvPr>
           <p:cNvPicPr>
             <a:picLocks noChangeAspect="1"/>
           </p:cNvPicPr>
           <p:nvPr/>
         </p:nvPicPr>
         <p:blipFill>
-          <a:blip r:embed="rId2"/>
+          <a:blip r:embed="rId3"/>
           <a:stretch>
             <a:fillRect/>
           </a:stretch>
@@ -4888,14 +5099,65 @@
         <p:spPr>
           <a:xfrm>
             <a:off x="0" y="0"/>
-            <a:ext cx="12191695" cy="6858000"/>
+            <a:ext cx="12192000" cy="6858000"/>
           </a:xfrm>
           <a:prstGeom prst="rect">
             <a:avLst/>
           </a:prstGeom>
         </p:spPr>
       </p:pic>
+      <p:sp>
+        <p:nvSpPr>
+          <p:cNvPr id="2" name="Seta: para Baixo 1">
+            <a:extLst>
+              <a:ext uri="{FF2B5EF4-FFF2-40B4-BE49-F238E27FC236}">
+                <a16:creationId xmlns:a16="http://schemas.microsoft.com/office/drawing/2014/main" id="{74DECB96-C08A-46D4-3B31-A99226124757}"/>
+              </a:ext>
+            </a:extLst>
+          </p:cNvPr>
+          <p:cNvSpPr/>
+          <p:nvPr/>
+        </p:nvSpPr>
+        <p:spPr>
+          <a:xfrm rot="10606554">
+            <a:off x="7332061" y="490844"/>
+            <a:ext cx="1716066" cy="2242159"/>
+          </a:xfrm>
+          <a:prstGeom prst="downArrow">
+            <a:avLst/>
+          </a:prstGeom>
+        </p:spPr>
+        <p:style>
+          <a:lnRef idx="2">
+            <a:schemeClr val="accent6">
+              <a:shade val="15000"/>
+            </a:schemeClr>
+          </a:lnRef>
+          <a:fillRef idx="1">
+            <a:schemeClr val="accent6"/>
+          </a:fillRef>
+          <a:effectRef idx="0">
+            <a:schemeClr val="accent6"/>
+          </a:effectRef>
+          <a:fontRef idx="minor">
+            <a:schemeClr val="lt1"/>
+          </a:fontRef>
+        </p:style>
+        <p:txBody>
+          <a:bodyPr rtlCol="0" anchor="ctr"/>
+          <a:lstStyle/>
+          <a:p>
+            <a:pPr algn="ctr"/>
+            <a:endParaRPr lang="en-US"/>
+          </a:p>
+        </p:txBody>
+      </p:sp>
     </p:spTree>
+    <p:extLst>
+      <p:ext uri="{BB962C8B-B14F-4D97-AF65-F5344CB8AC3E}">
+        <p14:creationId xmlns:p14="http://schemas.microsoft.com/office/powerpoint/2010/main" val="767375262"/>
+      </p:ext>
+    </p:extLst>
   </p:cSld>
   <p:clrMapOvr>
     <a:masterClrMapping/>
@@ -4904,7 +5166,7 @@
 </file>
 
 <file path=ppt/slides/slide3.xml><?xml version="1.0" encoding="utf-8"?>
-<p:sld xmlns:a="http://schemas.openxmlformats.org/drawingml/2006/main" xmlns:p="http://schemas.openxmlformats.org/presentationml/2006/main" xmlns:r="http://schemas.openxmlformats.org/officeDocument/2006/relationships">
+<p:sld xmlns:a="http://schemas.openxmlformats.org/drawingml/2006/main" xmlns:r="http://schemas.openxmlformats.org/officeDocument/2006/relationships" xmlns:p="http://schemas.openxmlformats.org/presentationml/2006/main">
   <p:cSld>
     <p:spTree>
       <p:nvGrpSpPr>
@@ -4912,17 +5174,79 @@
         <p:cNvGrpSpPr/>
         <p:nvPr/>
       </p:nvGrpSpPr>
-      <p:grpSpPr/>
+      <p:grpSpPr>
+        <a:xfrm>
+          <a:off x="0" y="0"/>
+          <a:ext cx="0" cy="0"/>
+          <a:chOff x="0" y="0"/>
+          <a:chExt cx="0" cy="0"/>
+        </a:xfrm>
+      </p:grpSpPr>
+      <p:sp>
+        <p:nvSpPr>
+          <p:cNvPr id="6" name="Retângulo 5">
+            <a:extLst>
+              <a:ext uri="{FF2B5EF4-FFF2-40B4-BE49-F238E27FC236}">
+                <a16:creationId xmlns:a16="http://schemas.microsoft.com/office/drawing/2014/main" id="{8DC220E4-CDF2-B2FC-8D4C-30090C957200}"/>
+              </a:ext>
+            </a:extLst>
+          </p:cNvPr>
+          <p:cNvSpPr/>
+          <p:nvPr/>
+        </p:nvSpPr>
+        <p:spPr>
+          <a:xfrm>
+            <a:off x="0" y="0"/>
+            <a:ext cx="12192000" cy="6858000"/>
+          </a:xfrm>
+          <a:prstGeom prst="rect">
+            <a:avLst/>
+          </a:prstGeom>
+          <a:solidFill>
+            <a:srgbClr val="0F172A"/>
+          </a:solidFill>
+        </p:spPr>
+        <p:style>
+          <a:lnRef idx="2">
+            <a:schemeClr val="accent1">
+              <a:shade val="15000"/>
+            </a:schemeClr>
+          </a:lnRef>
+          <a:fillRef idx="1">
+            <a:schemeClr val="accent1"/>
+          </a:fillRef>
+          <a:effectRef idx="0">
+            <a:schemeClr val="accent1"/>
+          </a:effectRef>
+          <a:fontRef idx="minor">
+            <a:schemeClr val="lt1"/>
+          </a:fontRef>
+        </p:style>
+        <p:txBody>
+          <a:bodyPr rtlCol="0" anchor="ctr"/>
+          <a:lstStyle/>
+          <a:p>
+            <a:pPr algn="ctr"/>
+            <a:endParaRPr lang="en-US"/>
+          </a:p>
+        </p:txBody>
+      </p:sp>
       <p:pic>
         <p:nvPicPr>
-          <p:cNvPr id="2" name="Picture 1" descr="mod12_slide3.png"/>
+          <p:cNvPr id="5" name="Imagem 4">
+            <a:extLst>
+              <a:ext uri="{FF2B5EF4-FFF2-40B4-BE49-F238E27FC236}">
+                <a16:creationId xmlns:a16="http://schemas.microsoft.com/office/drawing/2014/main" id="{8BE289DE-5943-D02B-A80B-361C2ADD4B2A}"/>
+              </a:ext>
+            </a:extLst>
+          </p:cNvPr>
           <p:cNvPicPr>
             <a:picLocks noChangeAspect="1"/>
           </p:cNvPicPr>
           <p:nvPr/>
         </p:nvPicPr>
         <p:blipFill>
-          <a:blip r:embed="rId2"/>
+          <a:blip r:embed="rId3"/>
           <a:stretch>
             <a:fillRect/>
           </a:stretch>
@@ -4930,14 +5254,65 @@
         <p:spPr>
           <a:xfrm>
             <a:off x="0" y="0"/>
-            <a:ext cx="12191695" cy="6858000"/>
+            <a:ext cx="12192000" cy="6858000"/>
           </a:xfrm>
           <a:prstGeom prst="rect">
             <a:avLst/>
           </a:prstGeom>
         </p:spPr>
       </p:pic>
+      <p:sp>
+        <p:nvSpPr>
+          <p:cNvPr id="2" name="Seta: para Baixo 1">
+            <a:extLst>
+              <a:ext uri="{FF2B5EF4-FFF2-40B4-BE49-F238E27FC236}">
+                <a16:creationId xmlns:a16="http://schemas.microsoft.com/office/drawing/2014/main" id="{74DECB96-C08A-46D4-3B31-A99226124757}"/>
+              </a:ext>
+            </a:extLst>
+          </p:cNvPr>
+          <p:cNvSpPr/>
+          <p:nvPr/>
+        </p:nvSpPr>
+        <p:spPr>
+          <a:xfrm rot="2049688">
+            <a:off x="2877291" y="1571599"/>
+            <a:ext cx="1716066" cy="2242159"/>
+          </a:xfrm>
+          <a:prstGeom prst="downArrow">
+            <a:avLst/>
+          </a:prstGeom>
+        </p:spPr>
+        <p:style>
+          <a:lnRef idx="2">
+            <a:schemeClr val="accent6">
+              <a:shade val="15000"/>
+            </a:schemeClr>
+          </a:lnRef>
+          <a:fillRef idx="1">
+            <a:schemeClr val="accent6"/>
+          </a:fillRef>
+          <a:effectRef idx="0">
+            <a:schemeClr val="accent6"/>
+          </a:effectRef>
+          <a:fontRef idx="minor">
+            <a:schemeClr val="lt1"/>
+          </a:fontRef>
+        </p:style>
+        <p:txBody>
+          <a:bodyPr rtlCol="0" anchor="ctr"/>
+          <a:lstStyle/>
+          <a:p>
+            <a:pPr algn="ctr"/>
+            <a:endParaRPr lang="en-US"/>
+          </a:p>
+        </p:txBody>
+      </p:sp>
     </p:spTree>
+    <p:extLst>
+      <p:ext uri="{BB962C8B-B14F-4D97-AF65-F5344CB8AC3E}">
+        <p14:creationId xmlns:p14="http://schemas.microsoft.com/office/powerpoint/2010/main" val="3583052561"/>
+      </p:ext>
+    </p:extLst>
   </p:cSld>
   <p:clrMapOvr>
     <a:masterClrMapping/>
@@ -4946,7 +5321,7 @@
 </file>
 
 <file path=ppt/slides/slide4.xml><?xml version="1.0" encoding="utf-8"?>
-<p:sld xmlns:a="http://schemas.openxmlformats.org/drawingml/2006/main" xmlns:p="http://schemas.openxmlformats.org/presentationml/2006/main" xmlns:r="http://schemas.openxmlformats.org/officeDocument/2006/relationships">
+<p:sld xmlns:a="http://schemas.openxmlformats.org/drawingml/2006/main" xmlns:r="http://schemas.openxmlformats.org/officeDocument/2006/relationships" xmlns:p="http://schemas.openxmlformats.org/presentationml/2006/main">
   <p:cSld>
     <p:spTree>
       <p:nvGrpSpPr>
@@ -4954,17 +5329,79 @@
         <p:cNvGrpSpPr/>
         <p:nvPr/>
       </p:nvGrpSpPr>
-      <p:grpSpPr/>
+      <p:grpSpPr>
+        <a:xfrm>
+          <a:off x="0" y="0"/>
+          <a:ext cx="0" cy="0"/>
+          <a:chOff x="0" y="0"/>
+          <a:chExt cx="0" cy="0"/>
+        </a:xfrm>
+      </p:grpSpPr>
+      <p:sp>
+        <p:nvSpPr>
+          <p:cNvPr id="6" name="Retângulo 5">
+            <a:extLst>
+              <a:ext uri="{FF2B5EF4-FFF2-40B4-BE49-F238E27FC236}">
+                <a16:creationId xmlns:a16="http://schemas.microsoft.com/office/drawing/2014/main" id="{8DC220E4-CDF2-B2FC-8D4C-30090C957200}"/>
+              </a:ext>
+            </a:extLst>
+          </p:cNvPr>
+          <p:cNvSpPr/>
+          <p:nvPr/>
+        </p:nvSpPr>
+        <p:spPr>
+          <a:xfrm>
+            <a:off x="0" y="0"/>
+            <a:ext cx="12192000" cy="6858000"/>
+          </a:xfrm>
+          <a:prstGeom prst="rect">
+            <a:avLst/>
+          </a:prstGeom>
+          <a:solidFill>
+            <a:srgbClr val="0F172A"/>
+          </a:solidFill>
+        </p:spPr>
+        <p:style>
+          <a:lnRef idx="2">
+            <a:schemeClr val="accent1">
+              <a:shade val="15000"/>
+            </a:schemeClr>
+          </a:lnRef>
+          <a:fillRef idx="1">
+            <a:schemeClr val="accent1"/>
+          </a:fillRef>
+          <a:effectRef idx="0">
+            <a:schemeClr val="accent1"/>
+          </a:effectRef>
+          <a:fontRef idx="minor">
+            <a:schemeClr val="lt1"/>
+          </a:fontRef>
+        </p:style>
+        <p:txBody>
+          <a:bodyPr rtlCol="0" anchor="ctr"/>
+          <a:lstStyle/>
+          <a:p>
+            <a:pPr algn="ctr"/>
+            <a:endParaRPr lang="en-US"/>
+          </a:p>
+        </p:txBody>
+      </p:sp>
       <p:pic>
         <p:nvPicPr>
-          <p:cNvPr id="2" name="Picture 1" descr="mod12_slide4.png"/>
+          <p:cNvPr id="4" name="Imagem 3">
+            <a:extLst>
+              <a:ext uri="{FF2B5EF4-FFF2-40B4-BE49-F238E27FC236}">
+                <a16:creationId xmlns:a16="http://schemas.microsoft.com/office/drawing/2014/main" id="{E135E325-3944-7AC9-2EA5-0F13994225C6}"/>
+              </a:ext>
+            </a:extLst>
+          </p:cNvPr>
           <p:cNvPicPr>
             <a:picLocks noChangeAspect="1"/>
           </p:cNvPicPr>
           <p:nvPr/>
         </p:nvPicPr>
         <p:blipFill>
-          <a:blip r:embed="rId2"/>
+          <a:blip r:embed="rId3"/>
           <a:stretch>
             <a:fillRect/>
           </a:stretch>
@@ -4972,14 +5409,65 @@
         <p:spPr>
           <a:xfrm>
             <a:off x="0" y="0"/>
-            <a:ext cx="12191695" cy="6858000"/>
+            <a:ext cx="12192000" cy="6858000"/>
           </a:xfrm>
           <a:prstGeom prst="rect">
             <a:avLst/>
           </a:prstGeom>
         </p:spPr>
       </p:pic>
+      <p:sp>
+        <p:nvSpPr>
+          <p:cNvPr id="2" name="Seta: para Baixo 1">
+            <a:extLst>
+              <a:ext uri="{FF2B5EF4-FFF2-40B4-BE49-F238E27FC236}">
+                <a16:creationId xmlns:a16="http://schemas.microsoft.com/office/drawing/2014/main" id="{74DECB96-C08A-46D4-3B31-A99226124757}"/>
+              </a:ext>
+            </a:extLst>
+          </p:cNvPr>
+          <p:cNvSpPr/>
+          <p:nvPr/>
+        </p:nvSpPr>
+        <p:spPr>
+          <a:xfrm rot="2049688">
+            <a:off x="7109322" y="1231630"/>
+            <a:ext cx="1716066" cy="2242159"/>
+          </a:xfrm>
+          <a:prstGeom prst="downArrow">
+            <a:avLst/>
+          </a:prstGeom>
+        </p:spPr>
+        <p:style>
+          <a:lnRef idx="2">
+            <a:schemeClr val="accent6">
+              <a:shade val="15000"/>
+            </a:schemeClr>
+          </a:lnRef>
+          <a:fillRef idx="1">
+            <a:schemeClr val="accent6"/>
+          </a:fillRef>
+          <a:effectRef idx="0">
+            <a:schemeClr val="accent6"/>
+          </a:effectRef>
+          <a:fontRef idx="minor">
+            <a:schemeClr val="lt1"/>
+          </a:fontRef>
+        </p:style>
+        <p:txBody>
+          <a:bodyPr rtlCol="0" anchor="ctr"/>
+          <a:lstStyle/>
+          <a:p>
+            <a:pPr algn="ctr"/>
+            <a:endParaRPr lang="en-US"/>
+          </a:p>
+        </p:txBody>
+      </p:sp>
     </p:spTree>
+    <p:extLst>
+      <p:ext uri="{BB962C8B-B14F-4D97-AF65-F5344CB8AC3E}">
+        <p14:creationId xmlns:p14="http://schemas.microsoft.com/office/powerpoint/2010/main" val="2910880230"/>
+      </p:ext>
+    </p:extLst>
   </p:cSld>
   <p:clrMapOvr>
     <a:masterClrMapping/>
@@ -4988,7 +5476,7 @@
 </file>
 
 <file path=ppt/slides/slide5.xml><?xml version="1.0" encoding="utf-8"?>
-<p:sld xmlns:a="http://schemas.openxmlformats.org/drawingml/2006/main" xmlns:p="http://schemas.openxmlformats.org/presentationml/2006/main" xmlns:r="http://schemas.openxmlformats.org/officeDocument/2006/relationships">
+<p:sld xmlns:a="http://schemas.openxmlformats.org/drawingml/2006/main" xmlns:r="http://schemas.openxmlformats.org/officeDocument/2006/relationships" xmlns:p="http://schemas.openxmlformats.org/presentationml/2006/main">
   <p:cSld>
     <p:spTree>
       <p:nvGrpSpPr>
@@ -4996,17 +5484,125 @@
         <p:cNvGrpSpPr/>
         <p:nvPr/>
       </p:nvGrpSpPr>
-      <p:grpSpPr/>
+      <p:grpSpPr>
+        <a:xfrm>
+          <a:off x="0" y="0"/>
+          <a:ext cx="0" cy="0"/>
+          <a:chOff x="0" y="0"/>
+          <a:chExt cx="0" cy="0"/>
+        </a:xfrm>
+      </p:grpSpPr>
+      <p:sp>
+        <p:nvSpPr>
+          <p:cNvPr id="6" name="Retângulo 5">
+            <a:extLst>
+              <a:ext uri="{FF2B5EF4-FFF2-40B4-BE49-F238E27FC236}">
+                <a16:creationId xmlns:a16="http://schemas.microsoft.com/office/drawing/2014/main" id="{8DC220E4-CDF2-B2FC-8D4C-30090C957200}"/>
+              </a:ext>
+            </a:extLst>
+          </p:cNvPr>
+          <p:cNvSpPr/>
+          <p:nvPr/>
+        </p:nvSpPr>
+        <p:spPr>
+          <a:xfrm>
+            <a:off x="0" y="0"/>
+            <a:ext cx="12192000" cy="6858000"/>
+          </a:xfrm>
+          <a:prstGeom prst="rect">
+            <a:avLst/>
+          </a:prstGeom>
+          <a:solidFill>
+            <a:srgbClr val="0F172A"/>
+          </a:solidFill>
+        </p:spPr>
+        <p:style>
+          <a:lnRef idx="2">
+            <a:schemeClr val="accent1">
+              <a:shade val="15000"/>
+            </a:schemeClr>
+          </a:lnRef>
+          <a:fillRef idx="1">
+            <a:schemeClr val="accent1"/>
+          </a:fillRef>
+          <a:effectRef idx="0">
+            <a:schemeClr val="accent1"/>
+          </a:effectRef>
+          <a:fontRef idx="minor">
+            <a:schemeClr val="lt1"/>
+          </a:fontRef>
+        </p:style>
+        <p:txBody>
+          <a:bodyPr rtlCol="0" anchor="ctr"/>
+          <a:lstStyle/>
+          <a:p>
+            <a:pPr algn="ctr"/>
+            <a:endParaRPr lang="en-US"/>
+          </a:p>
+        </p:txBody>
+      </p:sp>
+      <p:sp>
+        <p:nvSpPr>
+          <p:cNvPr id="2" name="Seta: para Baixo 1">
+            <a:extLst>
+              <a:ext uri="{FF2B5EF4-FFF2-40B4-BE49-F238E27FC236}">
+                <a16:creationId xmlns:a16="http://schemas.microsoft.com/office/drawing/2014/main" id="{74DECB96-C08A-46D4-3B31-A99226124757}"/>
+              </a:ext>
+            </a:extLst>
+          </p:cNvPr>
+          <p:cNvSpPr/>
+          <p:nvPr/>
+        </p:nvSpPr>
+        <p:spPr>
+          <a:xfrm rot="2049688">
+            <a:off x="7109322" y="1231630"/>
+            <a:ext cx="1716066" cy="2242159"/>
+          </a:xfrm>
+          <a:prstGeom prst="downArrow">
+            <a:avLst/>
+          </a:prstGeom>
+        </p:spPr>
+        <p:style>
+          <a:lnRef idx="2">
+            <a:schemeClr val="accent6">
+              <a:shade val="15000"/>
+            </a:schemeClr>
+          </a:lnRef>
+          <a:fillRef idx="1">
+            <a:schemeClr val="accent6"/>
+          </a:fillRef>
+          <a:effectRef idx="0">
+            <a:schemeClr val="accent6"/>
+          </a:effectRef>
+          <a:fontRef idx="minor">
+            <a:schemeClr val="lt1"/>
+          </a:fontRef>
+        </p:style>
+        <p:txBody>
+          <a:bodyPr rtlCol="0" anchor="ctr"/>
+          <a:lstStyle/>
+          <a:p>
+            <a:pPr algn="ctr"/>
+            <a:endParaRPr lang="en-US"/>
+          </a:p>
+        </p:txBody>
+      </p:sp>
       <p:pic>
         <p:nvPicPr>
-          <p:cNvPr id="2" name="Picture 1" descr="mod12_slide5.png"/>
+          <p:cNvPr id="5" name="Imagem 4">
+            <a:extLst>
+              <a:ext uri="{FF2B5EF4-FFF2-40B4-BE49-F238E27FC236}">
+                <a16:creationId xmlns:a16="http://schemas.microsoft.com/office/drawing/2014/main" id="{5E962778-EB9A-80BB-517D-7E5984E8BC7F}"/>
+              </a:ext>
+            </a:extLst>
+          </p:cNvPr>
           <p:cNvPicPr>
             <a:picLocks noChangeAspect="1"/>
           </p:cNvPicPr>
           <p:nvPr/>
         </p:nvPicPr>
         <p:blipFill>
-          <a:blip r:embed="rId2"/>
+          <a:blip r:embed="rId3"/>
           <a:stretch>
             <a:fillRect/>
           </a:stretch>
@@ -5014,14 +5610,65 @@
         <p:spPr>
           <a:xfrm>
             <a:off x="0" y="0"/>
-            <a:ext cx="12191695" cy="6858000"/>
+            <a:ext cx="12192000" cy="6858000"/>
           </a:xfrm>
           <a:prstGeom prst="rect">
             <a:avLst/>
           </a:prstGeom>
         </p:spPr>
       </p:pic>
+      <p:sp>
+        <p:nvSpPr>
+          <p:cNvPr id="7" name="Seta: para Baixo 6">
+            <a:extLst>
+              <a:ext uri="{FF2B5EF4-FFF2-40B4-BE49-F238E27FC236}">
+                <a16:creationId xmlns:a16="http://schemas.microsoft.com/office/drawing/2014/main" id="{A8004D9C-9B27-5780-6234-BE1933F8BEED}"/>
+              </a:ext>
+            </a:extLst>
+          </p:cNvPr>
+          <p:cNvSpPr/>
+          <p:nvPr/>
+        </p:nvSpPr>
+        <p:spPr>
+          <a:xfrm rot="9226030">
+            <a:off x="5769817" y="457907"/>
+            <a:ext cx="1716066" cy="2242159"/>
+          </a:xfrm>
+          <a:prstGeom prst="downArrow">
+            <a:avLst/>
+          </a:prstGeom>
+        </p:spPr>
+        <p:style>
+          <a:lnRef idx="2">
+            <a:schemeClr val="accent6">
+              <a:shade val="15000"/>
+            </a:schemeClr>
+          </a:lnRef>
+          <a:fillRef idx="1">
+            <a:schemeClr val="accent6"/>
+          </a:fillRef>
+          <a:effectRef idx="0">
+            <a:schemeClr val="accent6"/>
+          </a:effectRef>
+          <a:fontRef idx="minor">
+            <a:schemeClr val="lt1"/>
+          </a:fontRef>
+        </p:style>
+        <p:txBody>
+          <a:bodyPr rtlCol="0" anchor="ctr"/>
+          <a:lstStyle/>
+          <a:p>
+            <a:pPr algn="ctr"/>
+            <a:endParaRPr lang="en-US"/>
+          </a:p>
+        </p:txBody>
+      </p:sp>
     </p:spTree>
+    <p:extLst>
+      <p:ext uri="{BB962C8B-B14F-4D97-AF65-F5344CB8AC3E}">
+        <p14:creationId xmlns:p14="http://schemas.microsoft.com/office/powerpoint/2010/main" val="1977093695"/>
+      </p:ext>
+    </p:extLst>
   </p:cSld>
   <p:clrMapOvr>
     <a:masterClrMapping/>
@@ -5030,7 +5677,7 @@
 </file>
 
 <file path=ppt/slides/slide6.xml><?xml version="1.0" encoding="utf-8"?>
-<p:sld xmlns:a="http://schemas.openxmlformats.org/drawingml/2006/main" xmlns:p="http://schemas.openxmlformats.org/presentationml/2006/main" xmlns:r="http://schemas.openxmlformats.org/officeDocument/2006/relationships">
+<p:sld xmlns:a="http://schemas.openxmlformats.org/drawingml/2006/main" xmlns:r="http://schemas.openxmlformats.org/officeDocument/2006/relationships" xmlns:p="http://schemas.openxmlformats.org/presentationml/2006/main">
   <p:cSld>
     <p:spTree>
       <p:nvGrpSpPr>
@@ -5038,17 +5685,79 @@
         <p:cNvGrpSpPr/>
         <p:nvPr/>
       </p:nvGrpSpPr>
-      <p:grpSpPr/>
+      <p:grpSpPr>
+        <a:xfrm>
+          <a:off x="0" y="0"/>
+          <a:ext cx="0" cy="0"/>
+          <a:chOff x="0" y="0"/>
+          <a:chExt cx="0" cy="0"/>
+        </a:xfrm>
+      </p:grpSpPr>
+      <p:sp>
+        <p:nvSpPr>
+          <p:cNvPr id="6" name="Retângulo 5">
+            <a:extLst>
+              <a:ext uri="{FF2B5EF4-FFF2-40B4-BE49-F238E27FC236}">
+                <a16:creationId xmlns:a16="http://schemas.microsoft.com/office/drawing/2014/main" id="{8DC220E4-CDF2-B2FC-8D4C-30090C957200}"/>
+              </a:ext>
+            </a:extLst>
+          </p:cNvPr>
+          <p:cNvSpPr/>
+          <p:nvPr/>
+        </p:nvSpPr>
+        <p:spPr>
+          <a:xfrm>
+            <a:off x="0" y="0"/>
+            <a:ext cx="12192000" cy="6858000"/>
+          </a:xfrm>
+          <a:prstGeom prst="rect">
+            <a:avLst/>
+          </a:prstGeom>
+          <a:solidFill>
+            <a:srgbClr val="0F172A"/>
+          </a:solidFill>
+        </p:spPr>
+        <p:style>
+          <a:lnRef idx="2">
+            <a:schemeClr val="accent1">
+              <a:shade val="15000"/>
+            </a:schemeClr>
+          </a:lnRef>
+          <a:fillRef idx="1">
+            <a:schemeClr val="accent1"/>
+          </a:fillRef>
+          <a:effectRef idx="0">
+            <a:schemeClr val="accent1"/>
+          </a:effectRef>
+          <a:fontRef idx="minor">
+            <a:schemeClr val="lt1"/>
+          </a:fontRef>
+        </p:style>
+        <p:txBody>
+          <a:bodyPr rtlCol="0" anchor="ctr"/>
+          <a:lstStyle/>
+          <a:p>
+            <a:pPr algn="ctr"/>
+            <a:endParaRPr lang="en-US"/>
+          </a:p>
+        </p:txBody>
+      </p:sp>
       <p:pic>
         <p:nvPicPr>
-          <p:cNvPr id="2" name="Picture 1" descr="mod12_slide6.png"/>
+          <p:cNvPr id="4" name="Imagem 3">
+            <a:extLst>
+              <a:ext uri="{FF2B5EF4-FFF2-40B4-BE49-F238E27FC236}">
+                <a16:creationId xmlns:a16="http://schemas.microsoft.com/office/drawing/2014/main" id="{9F157B6B-8F2E-977F-5A62-4ED41124818C}"/>
+              </a:ext>
+            </a:extLst>
+          </p:cNvPr>
           <p:cNvPicPr>
             <a:picLocks noChangeAspect="1"/>
           </p:cNvPicPr>
           <p:nvPr/>
         </p:nvPicPr>
         <p:blipFill>
-          <a:blip r:embed="rId2"/>
+          <a:blip r:embed="rId3"/>
           <a:stretch>
             <a:fillRect/>
           </a:stretch>
@@ -5056,14 +5765,65 @@
         <p:spPr>
           <a:xfrm>
             <a:off x="0" y="0"/>
-            <a:ext cx="12191695" cy="6858000"/>
+            <a:ext cx="12192000" cy="6858000"/>
           </a:xfrm>
           <a:prstGeom prst="rect">
             <a:avLst/>
           </a:prstGeom>
         </p:spPr>
       </p:pic>
+      <p:sp>
+        <p:nvSpPr>
+          <p:cNvPr id="7" name="Seta: para Baixo 6">
+            <a:extLst>
+              <a:ext uri="{FF2B5EF4-FFF2-40B4-BE49-F238E27FC236}">
+                <a16:creationId xmlns:a16="http://schemas.microsoft.com/office/drawing/2014/main" id="{A8004D9C-9B27-5780-6234-BE1933F8BEED}"/>
+              </a:ext>
+            </a:extLst>
+          </p:cNvPr>
+          <p:cNvSpPr/>
+          <p:nvPr/>
+        </p:nvSpPr>
+        <p:spPr>
+          <a:xfrm rot="16740735">
+            <a:off x="6297356" y="1653661"/>
+            <a:ext cx="1716066" cy="2242159"/>
+          </a:xfrm>
+          <a:prstGeom prst="downArrow">
+            <a:avLst/>
+          </a:prstGeom>
+        </p:spPr>
+        <p:style>
+          <a:lnRef idx="2">
+            <a:schemeClr val="accent6">
+              <a:shade val="15000"/>
+            </a:schemeClr>
+          </a:lnRef>
+          <a:fillRef idx="1">
+            <a:schemeClr val="accent6"/>
+          </a:fillRef>
+          <a:effectRef idx="0">
+            <a:schemeClr val="accent6"/>
+          </a:effectRef>
+          <a:fontRef idx="minor">
+            <a:schemeClr val="lt1"/>
+          </a:fontRef>
+        </p:style>
+        <p:txBody>
+          <a:bodyPr rtlCol="0" anchor="ctr"/>
+          <a:lstStyle/>
+          <a:p>
+            <a:pPr algn="ctr"/>
+            <a:endParaRPr lang="en-US"/>
+          </a:p>
+        </p:txBody>
+      </p:sp>
     </p:spTree>
+    <p:extLst>
+      <p:ext uri="{BB962C8B-B14F-4D97-AF65-F5344CB8AC3E}">
+        <p14:creationId xmlns:p14="http://schemas.microsoft.com/office/powerpoint/2010/main" val="1215807306"/>
+      </p:ext>
+    </p:extLst>
   </p:cSld>
   <p:clrMapOvr>
     <a:masterClrMapping/>
@@ -5072,7 +5832,7 @@
 </file>
 
 <file path=ppt/slides/slide7.xml><?xml version="1.0" encoding="utf-8"?>
-<p:sld xmlns:a="http://schemas.openxmlformats.org/drawingml/2006/main" xmlns:p="http://schemas.openxmlformats.org/presentationml/2006/main" xmlns:r="http://schemas.openxmlformats.org/officeDocument/2006/relationships">
+<p:sld xmlns:a="http://schemas.openxmlformats.org/drawingml/2006/main" xmlns:r="http://schemas.openxmlformats.org/officeDocument/2006/relationships" xmlns:p="http://schemas.openxmlformats.org/presentationml/2006/main">
   <p:cSld>
     <p:spTree>
       <p:nvGrpSpPr>
@@ -5080,17 +5840,79 @@
         <p:cNvGrpSpPr/>
         <p:nvPr/>
       </p:nvGrpSpPr>
-      <p:grpSpPr/>
+      <p:grpSpPr>
+        <a:xfrm>
+          <a:off x="0" y="0"/>
+          <a:ext cx="0" cy="0"/>
+          <a:chOff x="0" y="0"/>
+          <a:chExt cx="0" cy="0"/>
+        </a:xfrm>
+      </p:grpSpPr>
+      <p:sp>
+        <p:nvSpPr>
+          <p:cNvPr id="6" name="Retângulo 5">
+            <a:extLst>
+              <a:ext uri="{FF2B5EF4-FFF2-40B4-BE49-F238E27FC236}">
+                <a16:creationId xmlns:a16="http://schemas.microsoft.com/office/drawing/2014/main" id="{8DC220E4-CDF2-B2FC-8D4C-30090C957200}"/>
+              </a:ext>
+            </a:extLst>
+          </p:cNvPr>
+          <p:cNvSpPr/>
+          <p:nvPr/>
+        </p:nvSpPr>
+        <p:spPr>
+          <a:xfrm>
+            <a:off x="0" y="0"/>
+            <a:ext cx="12192000" cy="6858000"/>
+          </a:xfrm>
+          <a:prstGeom prst="rect">
+            <a:avLst/>
+          </a:prstGeom>
+          <a:solidFill>
+            <a:srgbClr val="0F172A"/>
+          </a:solidFill>
+        </p:spPr>
+        <p:style>
+          <a:lnRef idx="2">
+            <a:schemeClr val="accent1">
+              <a:shade val="15000"/>
+            </a:schemeClr>
+          </a:lnRef>
+          <a:fillRef idx="1">
+            <a:schemeClr val="accent1"/>
+          </a:fillRef>
+          <a:effectRef idx="0">
+            <a:schemeClr val="accent1"/>
+          </a:effectRef>
+          <a:fontRef idx="minor">
+            <a:schemeClr val="lt1"/>
+          </a:fontRef>
+        </p:style>
+        <p:txBody>
+          <a:bodyPr rtlCol="0" anchor="ctr"/>
+          <a:lstStyle/>
+          <a:p>
+            <a:pPr algn="ctr"/>
+            <a:endParaRPr lang="en-US"/>
+          </a:p>
+        </p:txBody>
+      </p:sp>
       <p:pic>
         <p:nvPicPr>
-          <p:cNvPr id="2" name="Picture 1" descr="mod12_slide7.png"/>
+          <p:cNvPr id="3" name="Imagem 2">
+            <a:extLst>
+              <a:ext uri="{FF2B5EF4-FFF2-40B4-BE49-F238E27FC236}">
+                <a16:creationId xmlns:a16="http://schemas.microsoft.com/office/drawing/2014/main" id="{6321E436-416E-5133-AD4E-A8B3016DD44E}"/>
+              </a:ext>
+            </a:extLst>
+          </p:cNvPr>
           <p:cNvPicPr>
             <a:picLocks noChangeAspect="1"/>
           </p:cNvPicPr>
           <p:nvPr/>
         </p:nvPicPr>
         <p:blipFill>
-          <a:blip r:embed="rId2"/>
+          <a:blip r:embed="rId3"/>
           <a:stretch>
             <a:fillRect/>
           </a:stretch>
@@ -5098,7 +5920,7 @@
         <p:spPr>
           <a:xfrm>
             <a:off x="0" y="0"/>
-            <a:ext cx="12191695" cy="6858000"/>
+            <a:ext cx="12192000" cy="6858000"/>
           </a:xfrm>
           <a:prstGeom prst="rect">
             <a:avLst/>
@@ -5106,6 +5928,11 @@
         </p:spPr>
       </p:pic>
     </p:spTree>
+    <p:extLst>
+      <p:ext uri="{BB962C8B-B14F-4D97-AF65-F5344CB8AC3E}">
+        <p14:creationId xmlns:p14="http://schemas.microsoft.com/office/powerpoint/2010/main" val="3279086401"/>
+      </p:ext>
+    </p:extLst>
   </p:cSld>
   <p:clrMapOvr>
     <a:masterClrMapping/>
@@ -5114,7 +5941,7 @@
 </file>
 
 <file path=ppt/slides/slide8.xml><?xml version="1.0" encoding="utf-8"?>
-<p:sld xmlns:a="http://schemas.openxmlformats.org/drawingml/2006/main" xmlns:p="http://schemas.openxmlformats.org/presentationml/2006/main" xmlns:r="http://schemas.openxmlformats.org/officeDocument/2006/relationships">
+<p:sld xmlns:a="http://schemas.openxmlformats.org/drawingml/2006/main" xmlns:r="http://schemas.openxmlformats.org/officeDocument/2006/relationships" xmlns:p="http://schemas.openxmlformats.org/presentationml/2006/main">
   <p:cSld>
     <p:spTree>
       <p:nvGrpSpPr>
@@ -5122,17 +5949,79 @@
         <p:cNvGrpSpPr/>
         <p:nvPr/>
       </p:nvGrpSpPr>
-      <p:grpSpPr/>
+      <p:grpSpPr>
+        <a:xfrm>
+          <a:off x="0" y="0"/>
+          <a:ext cx="0" cy="0"/>
+          <a:chOff x="0" y="0"/>
+          <a:chExt cx="0" cy="0"/>
+        </a:xfrm>
+      </p:grpSpPr>
+      <p:sp>
+        <p:nvSpPr>
+          <p:cNvPr id="6" name="Retângulo 5">
+            <a:extLst>
+              <a:ext uri="{FF2B5EF4-FFF2-40B4-BE49-F238E27FC236}">
+                <a16:creationId xmlns:a16="http://schemas.microsoft.com/office/drawing/2014/main" id="{8DC220E4-CDF2-B2FC-8D4C-30090C957200}"/>
+              </a:ext>
+            </a:extLst>
+          </p:cNvPr>
+          <p:cNvSpPr/>
+          <p:nvPr/>
+        </p:nvSpPr>
+        <p:spPr>
+          <a:xfrm>
+            <a:off x="0" y="0"/>
+            <a:ext cx="12192000" cy="6858000"/>
+          </a:xfrm>
+          <a:prstGeom prst="rect">
+            <a:avLst/>
+          </a:prstGeom>
+          <a:solidFill>
+            <a:srgbClr val="0F172A"/>
+          </a:solidFill>
+        </p:spPr>
+        <p:style>
+          <a:lnRef idx="2">
+            <a:schemeClr val="accent1">
+              <a:shade val="15000"/>
+            </a:schemeClr>
+          </a:lnRef>
+          <a:fillRef idx="1">
+            <a:schemeClr val="accent1"/>
+          </a:fillRef>
+          <a:effectRef idx="0">
+            <a:schemeClr val="accent1"/>
+          </a:effectRef>
+          <a:fontRef idx="minor">
+            <a:schemeClr val="lt1"/>
+          </a:fontRef>
+        </p:style>
+        <p:txBody>
+          <a:bodyPr rtlCol="0" anchor="ctr"/>
+          <a:lstStyle/>
+          <a:p>
+            <a:pPr algn="ctr"/>
+            <a:endParaRPr lang="en-US"/>
+          </a:p>
+        </p:txBody>
+      </p:sp>
       <p:pic>
         <p:nvPicPr>
-          <p:cNvPr id="2" name="Picture 1" descr="mod12_slide8.png"/>
+          <p:cNvPr id="4" name="Imagem 3">
+            <a:extLst>
+              <a:ext uri="{FF2B5EF4-FFF2-40B4-BE49-F238E27FC236}">
+                <a16:creationId xmlns:a16="http://schemas.microsoft.com/office/drawing/2014/main" id="{906DEB77-8DDC-1E97-7CDC-FF86922B31A1}"/>
+              </a:ext>
+            </a:extLst>
+          </p:cNvPr>
           <p:cNvPicPr>
             <a:picLocks noChangeAspect="1"/>
           </p:cNvPicPr>
           <p:nvPr/>
         </p:nvPicPr>
         <p:blipFill>
-          <a:blip r:embed="rId2"/>
+          <a:blip r:embed="rId3"/>
           <a:stretch>
             <a:fillRect/>
           </a:stretch>
@@ -5140,7 +6029,7 @@
         <p:spPr>
           <a:xfrm>
             <a:off x="0" y="0"/>
-            <a:ext cx="12191695" cy="6858000"/>
+            <a:ext cx="12192000" cy="6858000"/>
           </a:xfrm>
           <a:prstGeom prst="rect">
             <a:avLst/>
@@ -5148,6 +6037,11 @@
         </p:spPr>
       </p:pic>
     </p:spTree>
+    <p:extLst>
+      <p:ext uri="{BB962C8B-B14F-4D97-AF65-F5344CB8AC3E}">
+        <p14:creationId xmlns:p14="http://schemas.microsoft.com/office/powerpoint/2010/main" val="903431314"/>
+      </p:ext>
+    </p:extLst>
   </p:cSld>
   <p:clrMapOvr>
     <a:masterClrMapping/>
@@ -5156,7 +6050,7 @@
 </file>
 
 <file path=ppt/slides/slide9.xml><?xml version="1.0" encoding="utf-8"?>
-<p:sld xmlns:a="http://schemas.openxmlformats.org/drawingml/2006/main" xmlns:p="http://schemas.openxmlformats.org/presentationml/2006/main" xmlns:r="http://schemas.openxmlformats.org/officeDocument/2006/relationships">
+<p:sld xmlns:a="http://schemas.openxmlformats.org/drawingml/2006/main" xmlns:r="http://schemas.openxmlformats.org/officeDocument/2006/relationships" xmlns:p="http://schemas.openxmlformats.org/presentationml/2006/main">
   <p:cSld>
     <p:spTree>
       <p:nvGrpSpPr>
@@ -5164,17 +6058,79 @@
         <p:cNvGrpSpPr/>
         <p:nvPr/>
       </p:nvGrpSpPr>
-      <p:grpSpPr/>
+      <p:grpSpPr>
+        <a:xfrm>
+          <a:off x="0" y="0"/>
+          <a:ext cx="0" cy="0"/>
+          <a:chOff x="0" y="0"/>
+          <a:chExt cx="0" cy="0"/>
+        </a:xfrm>
+      </p:grpSpPr>
+      <p:sp>
+        <p:nvSpPr>
+          <p:cNvPr id="6" name="Retângulo 5">
+            <a:extLst>
+              <a:ext uri="{FF2B5EF4-FFF2-40B4-BE49-F238E27FC236}">
+                <a16:creationId xmlns:a16="http://schemas.microsoft.com/office/drawing/2014/main" id="{8DC220E4-CDF2-B2FC-8D4C-30090C957200}"/>
+              </a:ext>
+            </a:extLst>
+          </p:cNvPr>
+          <p:cNvSpPr/>
+          <p:nvPr/>
+        </p:nvSpPr>
+        <p:spPr>
+          <a:xfrm>
+            <a:off x="0" y="0"/>
+            <a:ext cx="12192000" cy="6858000"/>
+          </a:xfrm>
+          <a:prstGeom prst="rect">
+            <a:avLst/>
+          </a:prstGeom>
+          <a:solidFill>
+            <a:srgbClr val="0F172A"/>
+          </a:solidFill>
+        </p:spPr>
+        <p:style>
+          <a:lnRef idx="2">
+            <a:schemeClr val="accent1">
+              <a:shade val="15000"/>
+            </a:schemeClr>
+          </a:lnRef>
+          <a:fillRef idx="1">
+            <a:schemeClr val="accent1"/>
+          </a:fillRef>
+          <a:effectRef idx="0">
+            <a:schemeClr val="accent1"/>
+          </a:effectRef>
+          <a:fontRef idx="minor">
+            <a:schemeClr val="lt1"/>
+          </a:fontRef>
+        </p:style>
+        <p:txBody>
+          <a:bodyPr rtlCol="0" anchor="ctr"/>
+          <a:lstStyle/>
+          <a:p>
+            <a:pPr algn="ctr"/>
+            <a:endParaRPr lang="en-US"/>
+          </a:p>
+        </p:txBody>
+      </p:sp>
       <p:pic>
         <p:nvPicPr>
-          <p:cNvPr id="2" name="Picture 1" descr="mod12_slide9.png"/>
+          <p:cNvPr id="3" name="Imagem 2">
+            <a:extLst>
+              <a:ext uri="{FF2B5EF4-FFF2-40B4-BE49-F238E27FC236}">
+                <a16:creationId xmlns:a16="http://schemas.microsoft.com/office/drawing/2014/main" id="{0EFEA9F5-3497-D7D9-839F-9E7E4FD920A3}"/>
+              </a:ext>
+            </a:extLst>
+          </p:cNvPr>
           <p:cNvPicPr>
             <a:picLocks noChangeAspect="1"/>
           </p:cNvPicPr>
           <p:nvPr/>
         </p:nvPicPr>
         <p:blipFill>
-          <a:blip r:embed="rId2"/>
+          <a:blip r:embed="rId3"/>
           <a:stretch>
             <a:fillRect/>
           </a:stretch>
@@ -5182,7 +6138,7 @@
         <p:spPr>
           <a:xfrm>
             <a:off x="0" y="0"/>
-            <a:ext cx="12191695" cy="6858000"/>
+            <a:ext cx="12192000" cy="6858000"/>
           </a:xfrm>
           <a:prstGeom prst="rect">
             <a:avLst/>
@@ -5190,6 +6146,11 @@
         </p:spPr>
       </p:pic>
     </p:spTree>
+    <p:extLst>
+      <p:ext uri="{BB962C8B-B14F-4D97-AF65-F5344CB8AC3E}">
+        <p14:creationId xmlns:p14="http://schemas.microsoft.com/office/powerpoint/2010/main" val="3212752460"/>
+      </p:ext>
+    </p:extLst>
   </p:cSld>
   <p:clrMapOvr>
     <a:masterClrMapping/>
@@ -5518,7 +6479,7 @@
 </file>
 
 <file path=ppt/theme/theme2.xml><?xml version="1.0" encoding="utf-8"?>
-<a:theme xmlns:a="http://schemas.openxmlformats.org/drawingml/2006/main" name="Office Theme">
+<a:theme xmlns:a="http://schemas.openxmlformats.org/drawingml/2006/main" name="Tema do Office">
   <a:themeElements>
     <a:clrScheme name="Office">
       <a:dk1>
@@ -5528,44 +6489,44 @@
         <a:sysClr val="window" lastClr="FFFFFF"/>
       </a:lt1>
       <a:dk2>
-        <a:srgbClr val="1F497D"/>
+        <a:srgbClr val="0E2841"/>
       </a:dk2>
       <a:lt2>
-        <a:srgbClr val="EEECE1"/>
+        <a:srgbClr val="E8E8E8"/>
       </a:lt2>
       <a:accent1>
-        <a:srgbClr val="4F81BD"/>
+        <a:srgbClr val="156082"/>
       </a:accent1>
       <a:accent2>
-        <a:srgbClr val="C0504D"/>
+        <a:srgbClr val="E97132"/>
       </a:accent2>
       <a:accent3>
-        <a:srgbClr val="9BBB59"/>
+        <a:srgbClr val="196B24"/>
       </a:accent3>
       <a:accent4>
-        <a:srgbClr val="8064A2"/>
+        <a:srgbClr val="0F9ED5"/>
       </a:accent4>
       <a:accent5>
-        <a:srgbClr val="4BACC6"/>
+        <a:srgbClr val="A02B93"/>
       </a:accent5>
       <a:accent6>
-        <a:srgbClr val="F79646"/>
+        <a:srgbClr val="4EA72E"/>
       </a:accent6>
       <a:hlink>
-        <a:srgbClr val="0000FF"/>
+        <a:srgbClr val="467886"/>
       </a:hlink>
       <a:folHlink>
-        <a:srgbClr val="800080"/>
+        <a:srgbClr val="96607D"/>
       </a:folHlink>
     </a:clrScheme>
     <a:fontScheme name="Office">
       <a:majorFont>
-        <a:latin typeface="Calibri"/>
+        <a:latin typeface="Aptos Display" panose="02110004020202020204"/>
         <a:ea typeface=""/>
         <a:cs typeface=""/>
-        <a:font script="Jpan" typeface="ＭＳ Ｐゴシック"/>
+        <a:font script="Jpan" typeface="游ゴシック Light"/>
         <a:font script="Hang" typeface="맑은 고딕"/>
-        <a:font script="Hans" typeface="宋体"/>
+        <a:font script="Hans" typeface="等线 Light"/>
         <a:font script="Hant" typeface="新細明體"/>
         <a:font script="Arab" typeface="Times New Roman"/>
         <a:font script="Hebr" typeface="Times New Roman"/>
@@ -5593,14 +6554,31 @@
         <a:font script="Viet" typeface="Times New Roman"/>
         <a:font script="Uigh" typeface="Microsoft Uighur"/>
         <a:font script="Geor" typeface="Sylfaen"/>
+        <a:font script="Armn" typeface="Arial"/>
+        <a:font script="Bugi" typeface="Leelawadee UI"/>
+        <a:font script="Bopo" typeface="Microsoft JhengHei"/>
+        <a:font script="Java" typeface="Javanese Text"/>
+        <a:font script="Lisu" typeface="Segoe UI"/>
+        <a:font script="Mymr" typeface="Myanmar Text"/>
+        <a:font script="Nkoo" typeface="Ebrima"/>
+        <a:font script="Olck" typeface="Nirmala UI"/>
+        <a:font script="Osma" typeface="Ebrima"/>
+        <a:font script="Phag" typeface="Phagspa"/>
+        <a:font script="Syrn" typeface="Estrangelo Edessa"/>
+        <a:font script="Syrj" typeface="Estrangelo Edessa"/>
+        <a:font script="Syre" typeface="Estrangelo Edessa"/>
+        <a:font script="Sora" typeface="Nirmala UI"/>
+        <a:font script="Tale" typeface="Microsoft Tai Le"/>
+        <a:font script="Talu" typeface="Microsoft New Tai Lue"/>
+        <a:font script="Tfng" typeface="Ebrima"/>
       </a:majorFont>
       <a:minorFont>
-        <a:latin typeface="Calibri"/>
+        <a:latin typeface="Aptos" panose="02110004020202020204"/>
         <a:ea typeface=""/>
         <a:cs typeface=""/>
-        <a:font script="Jpan" typeface="ＭＳ Ｐゴシック"/>
+        <a:font script="Jpan" typeface="游ゴシック"/>
         <a:font script="Hang" typeface="맑은 고딕"/>
-        <a:font script="Hans" typeface="宋体"/>
+        <a:font script="Hans" typeface="等线"/>
         <a:font script="Hant" typeface="新細明體"/>
         <a:font script="Arab" typeface="Arial"/>
         <a:font script="Hebr" typeface="Arial"/>
@@ -5628,6 +6606,23 @@
         <a:font script="Viet" typeface="Arial"/>
         <a:font script="Uigh" typeface="Microsoft Uighur"/>
         <a:font script="Geor" typeface="Sylfaen"/>
+        <a:font script="Armn" typeface="Arial"/>
+        <a:font script="Bugi" typeface="Leelawadee UI"/>
+        <a:font script="Bopo" typeface="Microsoft JhengHei"/>
+        <a:font script="Java" typeface="Javanese Text"/>
+        <a:font script="Lisu" typeface="Segoe UI"/>
+        <a:font script="Mymr" typeface="Myanmar Text"/>
+        <a:font script="Nkoo" typeface="Ebrima"/>
+        <a:font script="Olck" typeface="Nirmala UI"/>
+        <a:font script="Osma" typeface="Ebrima"/>
+        <a:font script="Phag" typeface="Phagspa"/>
+        <a:font script="Syrn" typeface="Estrangelo Edessa"/>
+        <a:font script="Syrj" typeface="Estrangelo Edessa"/>
+        <a:font script="Syre" typeface="Estrangelo Edessa"/>
+        <a:font script="Sora" typeface="Nirmala UI"/>
+        <a:font script="Tale" typeface="Microsoft Tai Le"/>
+        <a:font script="Talu" typeface="Microsoft New Tai Lue"/>
+        <a:font script="Tfng" typeface="Ebrima"/>
       </a:minorFont>
     </a:fontScheme>
     <a:fmtScheme name="Office">
@@ -5639,180 +6634,136 @@
           <a:gsLst>
             <a:gs pos="0">
               <a:schemeClr val="phClr">
-                <a:tint val="50000"/>
-                <a:satMod val="300000"/>
+                <a:lumMod val="110000"/>
+                <a:satMod val="105000"/>
+                <a:tint val="67000"/>
               </a:schemeClr>
             </a:gs>
-            <a:gs pos="35000">
+            <a:gs pos="50000">
               <a:schemeClr val="phClr">
-                <a:tint val="37000"/>
-                <a:satMod val="300000"/>
+                <a:lumMod val="105000"/>
+                <a:satMod val="103000"/>
+                <a:tint val="73000"/>
               </a:schemeClr>
             </a:gs>
             <a:gs pos="100000">
               <a:schemeClr val="phClr">
-                <a:tint val="15000"/>
-                <a:satMod val="350000"/>
+                <a:lumMod val="105000"/>
+                <a:satMod val="109000"/>
+                <a:tint val="81000"/>
               </a:schemeClr>
             </a:gs>
           </a:gsLst>
-          <a:lin ang="16200000" scaled="1"/>
+          <a:lin ang="5400000" scaled="0"/>
         </a:gradFill>
         <a:gradFill rotWithShape="1">
           <a:gsLst>
             <a:gs pos="0">
               <a:schemeClr val="phClr">
-                <a:tint val="100000"/>
+                <a:satMod val="103000"/>
+                <a:lumMod val="102000"/>
+                <a:tint val="94000"/>
+              </a:schemeClr>
+            </a:gs>
+            <a:gs pos="50000">
+              <a:schemeClr val="phClr">
+                <a:satMod val="110000"/>
+                <a:lumMod val="100000"/>
                 <a:shade val="100000"/>
-                <a:satMod val="130000"/>
               </a:schemeClr>
             </a:gs>
             <a:gs pos="100000">
               <a:schemeClr val="phClr">
-                <a:tint val="50000"/>
-                <a:shade val="100000"/>
-                <a:satMod val="350000"/>
+                <a:lumMod val="99000"/>
+                <a:satMod val="120000"/>
+                <a:shade val="78000"/>
               </a:schemeClr>
             </a:gs>
           </a:gsLst>
-          <a:lin ang="16200000" scaled="0"/>
+          <a:lin ang="5400000" scaled="0"/>
         </a:gradFill>
       </a:fillStyleLst>
       <a:lnStyleLst>
-        <a:ln w="9525" cap="flat" cmpd="sng" algn="ctr">
+        <a:ln w="12700" cap="flat" cmpd="sng" algn="ctr">
           <a:solidFill>
-            <a:schemeClr val="phClr">
-              <a:shade val="95000"/>
-              <a:satMod val="105000"/>
-            </a:schemeClr>
+            <a:schemeClr val="phClr"/>
           </a:solidFill>
           <a:prstDash val="solid"/>
+          <a:miter lim="800000"/>
+        </a:ln>
+        <a:ln w="19050" cap="flat" cmpd="sng" algn="ctr">
+          <a:solidFill>
+            <a:schemeClr val="phClr"/>
+          </a:solidFill>
+          <a:prstDash val="solid"/>
+          <a:miter lim="800000"/>
         </a:ln>
         <a:ln w="25400" cap="flat" cmpd="sng" algn="ctr">
           <a:solidFill>
             <a:schemeClr val="phClr"/>
           </a:solidFill>
           <a:prstDash val="solid"/>
-        </a:ln>
-        <a:ln w="38100" cap="flat" cmpd="sng" algn="ctr">
-          <a:solidFill>
-            <a:schemeClr val="phClr"/>
-          </a:solidFill>
-          <a:prstDash val="solid"/>
+          <a:miter lim="800000"/>
         </a:ln>
       </a:lnStyleLst>
       <a:effectStyleLst>
         <a:effectStyle>
+          <a:effectLst/>
+        </a:effectStyle>
+        <a:effectStyle>
+          <a:effectLst/>
+        </a:effectStyle>
+        <a:effectStyle>
           <a:effectLst>
-            <a:outerShdw blurRad="40000" dist="20000" dir="5400000" rotWithShape="0">
+            <a:outerShdw blurRad="57150" dist="19050" dir="5400000" algn="ctr" rotWithShape="0">
               <a:srgbClr val="000000">
-                <a:alpha val="38000"/>
+                <a:alpha val="63000"/>
               </a:srgbClr>
             </a:outerShdw>
           </a:effectLst>
-        </a:effectStyle>
-        <a:effectStyle>
-          <a:effectLst>
-            <a:outerShdw blurRad="40000" dist="23000" dir="5400000" rotWithShape="0">
-              <a:srgbClr val="000000">
-                <a:alpha val="35000"/>
-              </a:srgbClr>
-            </a:outerShdw>
-          </a:effectLst>
-        </a:effectStyle>
-        <a:effectStyle>
-          <a:effectLst>
-            <a:outerShdw blurRad="40000" dist="23000" dir="5400000" rotWithShape="0">
-              <a:srgbClr val="000000">
-                <a:alpha val="35000"/>
-              </a:srgbClr>
-            </a:outerShdw>
-          </a:effectLst>
-          <a:scene3d>
-            <a:camera prst="orthographicFront">
-              <a:rot lat="0" lon="0" rev="0"/>
-            </a:camera>
-            <a:lightRig rig="threePt" dir="t">
-              <a:rot lat="0" lon="0" rev="1200000"/>
-            </a:lightRig>
-          </a:scene3d>
-          <a:sp3d>
-            <a:bevelT w="63500" h="25400"/>
-          </a:sp3d>
         </a:effectStyle>
       </a:effectStyleLst>
       <a:bgFillStyleLst>
         <a:solidFill>
           <a:schemeClr val="phClr"/>
         </a:solidFill>
+        <a:solidFill>
+          <a:schemeClr val="phClr">
+            <a:tint val="95000"/>
+            <a:satMod val="170000"/>
+          </a:schemeClr>
+        </a:solidFill>
         <a:gradFill rotWithShape="1">
           <a:gsLst>
             <a:gs pos="0">
               <a:schemeClr val="phClr">
-                <a:tint val="40000"/>
-                <a:satMod val="350000"/>
+                <a:tint val="93000"/>
+                <a:satMod val="150000"/>
+                <a:shade val="98000"/>
+                <a:lumMod val="102000"/>
               </a:schemeClr>
             </a:gs>
-            <a:gs pos="40000">
+            <a:gs pos="50000">
               <a:schemeClr val="phClr">
-                <a:tint val="45000"/>
-                <a:shade val="99000"/>
-                <a:satMod val="350000"/>
+                <a:tint val="98000"/>
+                <a:satMod val="130000"/>
+                <a:shade val="90000"/>
+                <a:lumMod val="103000"/>
               </a:schemeClr>
             </a:gs>
             <a:gs pos="100000">
               <a:schemeClr val="phClr">
-                <a:shade val="20000"/>
-                <a:satMod val="255000"/>
+                <a:shade val="63000"/>
+                <a:satMod val="120000"/>
               </a:schemeClr>
             </a:gs>
           </a:gsLst>
-          <a:path path="circle">
-            <a:fillToRect l="50000" t="-80000" r="50000" b="180000"/>
-          </a:path>
-        </a:gradFill>
-        <a:gradFill rotWithShape="1">
-          <a:gsLst>
-            <a:gs pos="0">
-              <a:schemeClr val="phClr">
-                <a:tint val="80000"/>
-                <a:satMod val="300000"/>
-              </a:schemeClr>
-            </a:gs>
-            <a:gs pos="100000">
-              <a:schemeClr val="phClr">
-                <a:shade val="30000"/>
-                <a:satMod val="200000"/>
-              </a:schemeClr>
-            </a:gs>
-          </a:gsLst>
-          <a:path path="circle">
-            <a:fillToRect l="50000" t="50000" r="50000" b="50000"/>
-          </a:path>
+          <a:lin ang="5400000" scaled="0"/>
         </a:gradFill>
       </a:bgFillStyleLst>
     </a:fmtScheme>
   </a:themeElements>
   <a:objectDefaults>
-    <a:spDef>
-      <a:spPr/>
-      <a:bodyPr/>
-      <a:lstStyle/>
-      <a:style>
-        <a:lnRef idx="1">
-          <a:schemeClr val="accent1"/>
-        </a:lnRef>
-        <a:fillRef idx="3">
-          <a:schemeClr val="accent1"/>
-        </a:fillRef>
-        <a:effectRef idx="2">
-          <a:schemeClr val="accent1"/>
-        </a:effectRef>
-        <a:fontRef idx="minor">
-          <a:schemeClr val="lt1"/>
-        </a:fontRef>
-      </a:style>
-    </a:spDef>
     <a:lnDef>
       <a:spPr/>
       <a:bodyPr/>
@@ -5834,5 +6785,10 @@
     </a:lnDef>
   </a:objectDefaults>
   <a:extraClrSchemeLst/>
+  <a:extLst>
+    <a:ext uri="{05A4C25C-085E-4340-85A3-A5531E510DB2}">
+      <thm15:themeFamily xmlns:thm15="http://schemas.microsoft.com/office/thememl/2012/main" name="Office Theme" id="{2E142A2C-CD16-42D6-873A-C26D2A0506FA}" vid="{1BDDFF52-6CD6-40A5-AB3C-68EB2F1E4D0A}"/>
+    </a:ext>
+  </a:extLst>
 </a:theme>
 </file>